--- a/week05/Lab05.pptx
+++ b/week05/Lab05.pptx
@@ -254,7 +254,7 @@
           <a:p>
             <a:fld id="{D1237EF7-A117-46B7-88A8-1B7FB98FF0F2}" type="datetimeFigureOut">
               <a:rPr lang="zh-CN" altLang="en-US" smtClean="0"/>
-              <a:t>2025/3/19</a:t>
+              <a:t>2026/3/29</a:t>
             </a:fld>
             <a:endParaRPr lang="zh-CN" altLang="en-US"/>
           </a:p>
@@ -1119,7 +1119,7 @@
           <a:p>
             <a:fld id="{FC19A4FA-3D9A-4114-B0D5-759CBD56F1AB}" type="datetimeFigureOut">
               <a:rPr lang="zh-CN" altLang="en-US" smtClean="0"/>
-              <a:t>2025/3/19</a:t>
+              <a:t>2026/3/29</a:t>
             </a:fld>
             <a:endParaRPr lang="zh-CN" altLang="en-US"/>
           </a:p>
@@ -1313,7 +1313,7 @@
           <a:p>
             <a:fld id="{FC19A4FA-3D9A-4114-B0D5-759CBD56F1AB}" type="datetimeFigureOut">
               <a:rPr lang="zh-CN" altLang="en-US" smtClean="0"/>
-              <a:t>2025/3/19</a:t>
+              <a:t>2026/3/29</a:t>
             </a:fld>
             <a:endParaRPr lang="zh-CN" altLang="en-US"/>
           </a:p>
@@ -1486,7 +1486,7 @@
           <a:p>
             <a:fld id="{FC19A4FA-3D9A-4114-B0D5-759CBD56F1AB}" type="datetimeFigureOut">
               <a:rPr lang="zh-CN" altLang="en-US" smtClean="0"/>
-              <a:t>2025/3/19</a:t>
+              <a:t>2026/3/29</a:t>
             </a:fld>
             <a:endParaRPr lang="zh-CN" altLang="en-US"/>
           </a:p>
@@ -1670,7 +1670,7 @@
           <a:p>
             <a:fld id="{FC19A4FA-3D9A-4114-B0D5-759CBD56F1AB}" type="datetimeFigureOut">
               <a:rPr lang="zh-CN" altLang="en-US" smtClean="0"/>
-              <a:t>2025/3/19</a:t>
+              <a:t>2026/3/29</a:t>
             </a:fld>
             <a:endParaRPr lang="zh-CN" altLang="en-US"/>
           </a:p>
@@ -1927,7 +1927,7 @@
           <a:p>
             <a:fld id="{FC19A4FA-3D9A-4114-B0D5-759CBD56F1AB}" type="datetimeFigureOut">
               <a:rPr lang="zh-CN" altLang="en-US" smtClean="0"/>
-              <a:t>2025/3/19</a:t>
+              <a:t>2026/3/29</a:t>
             </a:fld>
             <a:endParaRPr lang="zh-CN" altLang="en-US"/>
           </a:p>
@@ -2314,7 +2314,7 @@
           <a:p>
             <a:fld id="{FC19A4FA-3D9A-4114-B0D5-759CBD56F1AB}" type="datetimeFigureOut">
               <a:rPr lang="zh-CN" altLang="en-US" smtClean="0"/>
-              <a:t>2025/3/19</a:t>
+              <a:t>2026/3/29</a:t>
             </a:fld>
             <a:endParaRPr lang="zh-CN" altLang="en-US"/>
           </a:p>
@@ -2582,7 +2582,7 @@
           <a:p>
             <a:fld id="{FC19A4FA-3D9A-4114-B0D5-759CBD56F1AB}" type="datetimeFigureOut">
               <a:rPr lang="zh-CN" altLang="en-US" smtClean="0"/>
-              <a:t>2025/3/19</a:t>
+              <a:t>2026/3/29</a:t>
             </a:fld>
             <a:endParaRPr lang="zh-CN" altLang="en-US"/>
           </a:p>
@@ -2722,7 +2722,7 @@
           <a:p>
             <a:fld id="{FC19A4FA-3D9A-4114-B0D5-759CBD56F1AB}" type="datetimeFigureOut">
               <a:rPr lang="zh-CN" altLang="en-US" smtClean="0"/>
-              <a:t>2025/3/19</a:t>
+              <a:t>2026/3/29</a:t>
             </a:fld>
             <a:endParaRPr lang="zh-CN" altLang="en-US"/>
           </a:p>
@@ -2812,7 +2812,7 @@
           <a:p>
             <a:fld id="{FC19A4FA-3D9A-4114-B0D5-759CBD56F1AB}" type="datetimeFigureOut">
               <a:rPr lang="zh-CN" altLang="en-US" smtClean="0"/>
-              <a:t>2025/3/19</a:t>
+              <a:t>2026/3/29</a:t>
             </a:fld>
             <a:endParaRPr lang="zh-CN" altLang="en-US"/>
           </a:p>
@@ -3082,7 +3082,7 @@
           <a:p>
             <a:fld id="{FC19A4FA-3D9A-4114-B0D5-759CBD56F1AB}" type="datetimeFigureOut">
               <a:rPr lang="zh-CN" altLang="en-US" smtClean="0"/>
-              <a:t>2025/3/19</a:t>
+              <a:t>2026/3/29</a:t>
             </a:fld>
             <a:endParaRPr lang="zh-CN" altLang="en-US"/>
           </a:p>
@@ -3329,7 +3329,7 @@
           <a:p>
             <a:fld id="{FC19A4FA-3D9A-4114-B0D5-759CBD56F1AB}" type="datetimeFigureOut">
               <a:rPr lang="zh-CN" altLang="en-US" smtClean="0"/>
-              <a:t>2025/3/19</a:t>
+              <a:t>2026/3/29</a:t>
             </a:fld>
             <a:endParaRPr lang="zh-CN" altLang="en-US"/>
           </a:p>
@@ -3535,7 +3535,7 @@
           <a:p>
             <a:fld id="{FC19A4FA-3D9A-4114-B0D5-759CBD56F1AB}" type="datetimeFigureOut">
               <a:rPr lang="zh-CN" altLang="en-US" smtClean="0"/>
-              <a:t>2025/3/19</a:t>
+              <a:t>2026/3/29</a:t>
             </a:fld>
             <a:endParaRPr lang="zh-CN" altLang="en-US"/>
           </a:p>
@@ -4934,7 +4934,7 @@
         <p:spPr>
           <a:xfrm>
             <a:off x="1005205" y="1327150"/>
-            <a:ext cx="4957445" cy="2101850"/>
+            <a:ext cx="5090795" cy="2101850"/>
           </a:xfrm>
         </p:spPr>
         <p:txBody>
@@ -4946,14 +4946,22 @@
             <a:pPr lvl="1"/>
             <a:r>
               <a:rPr lang="en-US" altLang="zh-CN" dirty="0"/>
-              <a:t>Tips1: </a:t>
+              <a:t>Tip</a:t>
+            </a:r>
+            <a:r>
+              <a:rPr lang="zh-CN" altLang="en-US" dirty="0"/>
+              <a:t> </a:t>
+            </a:r>
+            <a:r>
+              <a:rPr lang="en-US" altLang="zh-CN" dirty="0"/>
+              <a:t>1: </a:t>
             </a:r>
           </a:p>
           <a:p>
             <a:pPr lvl="2"/>
             <a:r>
               <a:rPr lang="en-US" altLang="zh-CN" dirty="0"/>
-              <a:t>check if malloc/new is successful</a:t>
+              <a:t>Check if malloc/new is successful</a:t>
             </a:r>
             <a:endParaRPr lang="zh-CN" altLang="en-US" dirty="0"/>
           </a:p>
@@ -4961,28 +4969,44 @@
             <a:pPr lvl="1"/>
             <a:r>
               <a:rPr lang="en-US" altLang="zh-CN" dirty="0"/>
-              <a:t>Tips2: </a:t>
+              <a:t>Tip</a:t>
+            </a:r>
+            <a:r>
+              <a:rPr lang="zh-CN" altLang="en-US" dirty="0"/>
+              <a:t> </a:t>
+            </a:r>
+            <a:r>
+              <a:rPr lang="en-US" altLang="zh-CN" dirty="0"/>
+              <a:t>2: </a:t>
             </a:r>
           </a:p>
           <a:p>
             <a:pPr lvl="2"/>
             <a:r>
               <a:rPr lang="en-US" altLang="zh-CN" dirty="0"/>
-              <a:t> don’t forget to free/del the space </a:t>
+              <a:t> Don’t forget to free/delete allocated memory </a:t>
             </a:r>
           </a:p>
           <a:p>
             <a:pPr lvl="1"/>
             <a:r>
               <a:rPr lang="en-US" altLang="zh-CN" dirty="0"/>
-              <a:t>Tips3: </a:t>
+              <a:t>Tip</a:t>
+            </a:r>
+            <a:r>
+              <a:rPr lang="zh-CN" altLang="en-US" dirty="0"/>
+              <a:t> </a:t>
+            </a:r>
+            <a:r>
+              <a:rPr lang="en-US" altLang="zh-CN" dirty="0"/>
+              <a:t>3: </a:t>
             </a:r>
           </a:p>
           <a:p>
             <a:pPr lvl="2"/>
             <a:r>
               <a:rPr lang="en-US" altLang="zh-CN" dirty="0"/>
-              <a:t>assign NULL to the pointer after del/free the related space</a:t>
+              <a:t>Assign NULL to the pointer after free/delete memory</a:t>
             </a:r>
             <a:endParaRPr lang="zh-CN" altLang="en-US" dirty="0"/>
           </a:p>
@@ -7344,8 +7368,8 @@
         </p:nvSpPr>
         <p:spPr>
           <a:xfrm>
-            <a:off x="1273875" y="946383"/>
-            <a:ext cx="7587889" cy="5909310"/>
+            <a:off x="1086984" y="1447975"/>
+            <a:ext cx="7587889" cy="4616648"/>
           </a:xfrm>
           <a:prstGeom prst="rect">
             <a:avLst/>
@@ -7370,7 +7394,7 @@
           <a:p>
             <a:pPr algn="l"/>
             <a:r>
-              <a:rPr lang="en-US" altLang="zh-CN" sz="1800" kern="0" dirty="0">
+              <a:rPr lang="en-US" altLang="zh-CN" sz="1400" kern="0" dirty="0">
                 <a:solidFill>
                   <a:srgbClr val="AF00DB"/>
                 </a:solidFill>
@@ -7382,7 +7406,7 @@
               <a:t>#include</a:t>
             </a:r>
             <a:r>
-              <a:rPr lang="en-US" altLang="zh-CN" sz="1800" kern="0" dirty="0">
+              <a:rPr lang="en-US" altLang="zh-CN" sz="1400" kern="0" dirty="0">
                 <a:solidFill>
                   <a:srgbClr val="A31515"/>
                 </a:solidFill>
@@ -7394,7 +7418,7 @@
               <a:t>&lt;</a:t>
             </a:r>
             <a:r>
-              <a:rPr lang="en-US" altLang="zh-CN" sz="1800" kern="0" dirty="0" err="1">
+              <a:rPr lang="en-US" altLang="zh-CN" sz="1400" kern="0" dirty="0" err="1">
                 <a:solidFill>
                   <a:srgbClr val="A31515"/>
                 </a:solidFill>
@@ -7406,7 +7430,7 @@
               <a:t>stdio.h</a:t>
             </a:r>
             <a:r>
-              <a:rPr lang="en-US" altLang="zh-CN" sz="1800" kern="0" dirty="0">
+              <a:rPr lang="en-US" altLang="zh-CN" sz="1400" kern="0" dirty="0">
                 <a:solidFill>
                   <a:srgbClr val="A31515"/>
                 </a:solidFill>
@@ -7417,7 +7441,7 @@
               </a:rPr>
               <a:t>&gt;</a:t>
             </a:r>
-            <a:endParaRPr lang="zh-CN" altLang="zh-CN" sz="1800" kern="100" dirty="0">
+            <a:endParaRPr lang="zh-CN" altLang="zh-CN" sz="1400" kern="100" dirty="0">
               <a:effectLst/>
               <a:latin typeface="DengXian" panose="02010600030101010101" pitchFamily="2" charset="-122"/>
               <a:ea typeface="DengXian" panose="02010600030101010101" pitchFamily="2" charset="-122"/>
@@ -7427,7 +7451,7 @@
           <a:p>
             <a:pPr algn="l"/>
             <a:r>
-              <a:rPr lang="en-US" altLang="zh-CN" sz="1800" kern="0" dirty="0">
+              <a:rPr lang="en-US" altLang="zh-CN" sz="1400" kern="0" dirty="0">
                 <a:solidFill>
                   <a:srgbClr val="0000FF"/>
                 </a:solidFill>
@@ -7439,7 +7463,7 @@
               <a:t>int</a:t>
             </a:r>
             <a:r>
-              <a:rPr lang="en-US" altLang="zh-CN" sz="1800" kern="0" dirty="0">
+              <a:rPr lang="en-US" altLang="zh-CN" sz="1400" kern="0" dirty="0">
                 <a:solidFill>
                   <a:srgbClr val="000000"/>
                 </a:solidFill>
@@ -7451,7 +7475,7 @@
               <a:t> </a:t>
             </a:r>
             <a:r>
-              <a:rPr lang="en-US" altLang="zh-CN" sz="1800" kern="0" dirty="0">
+              <a:rPr lang="en-US" altLang="zh-CN" sz="1400" kern="0" dirty="0">
                 <a:solidFill>
                   <a:srgbClr val="795E26"/>
                 </a:solidFill>
@@ -7463,7 +7487,7 @@
               <a:t>main</a:t>
             </a:r>
             <a:r>
-              <a:rPr lang="en-US" altLang="zh-CN" sz="1800" kern="0" dirty="0">
+              <a:rPr lang="en-US" altLang="zh-CN" sz="1400" kern="0" dirty="0">
                 <a:solidFill>
                   <a:srgbClr val="000000"/>
                 </a:solidFill>
@@ -7474,7 +7498,7 @@
               </a:rPr>
               <a:t>() </a:t>
             </a:r>
-            <a:endParaRPr lang="zh-CN" altLang="zh-CN" sz="1800" kern="100" dirty="0">
+            <a:endParaRPr lang="zh-CN" altLang="zh-CN" sz="1400" kern="100" dirty="0">
               <a:effectLst/>
               <a:latin typeface="DengXian" panose="02010600030101010101" pitchFamily="2" charset="-122"/>
               <a:ea typeface="DengXian" panose="02010600030101010101" pitchFamily="2" charset="-122"/>
@@ -7484,7 +7508,7 @@
           <a:p>
             <a:pPr algn="l"/>
             <a:r>
-              <a:rPr lang="en-US" altLang="zh-CN" sz="1800" kern="0" dirty="0">
+              <a:rPr lang="en-US" altLang="zh-CN" sz="1400" kern="0" dirty="0">
                 <a:solidFill>
                   <a:srgbClr val="000000"/>
                 </a:solidFill>
@@ -7495,7 +7519,7 @@
               </a:rPr>
               <a:t>{ </a:t>
             </a:r>
-            <a:endParaRPr lang="zh-CN" altLang="zh-CN" sz="1800" kern="100" dirty="0">
+            <a:endParaRPr lang="zh-CN" altLang="zh-CN" sz="1400" kern="100" dirty="0">
               <a:effectLst/>
               <a:latin typeface="DengXian" panose="02010600030101010101" pitchFamily="2" charset="-122"/>
               <a:ea typeface="DengXian" panose="02010600030101010101" pitchFamily="2" charset="-122"/>
@@ -7505,7 +7529,7 @@
           <a:p>
             <a:pPr algn="l"/>
             <a:r>
-              <a:rPr lang="en-US" altLang="zh-CN" sz="1800" kern="0" dirty="0">
+              <a:rPr lang="en-US" altLang="zh-CN" sz="1400" kern="0" dirty="0">
                 <a:solidFill>
                   <a:srgbClr val="000000"/>
                 </a:solidFill>
@@ -7517,7 +7541,7 @@
               <a:t>    </a:t>
             </a:r>
             <a:r>
-              <a:rPr lang="en-US" altLang="zh-CN" sz="1800" kern="0" dirty="0">
+              <a:rPr lang="en-US" altLang="zh-CN" sz="1400" kern="0" dirty="0">
                 <a:solidFill>
                   <a:srgbClr val="0000FF"/>
                 </a:solidFill>
@@ -7529,7 +7553,7 @@
               <a:t>int</a:t>
             </a:r>
             <a:r>
-              <a:rPr lang="en-US" altLang="zh-CN" sz="1800" kern="0" dirty="0">
+              <a:rPr lang="en-US" altLang="zh-CN" sz="1400" kern="0" dirty="0">
                 <a:solidFill>
                   <a:srgbClr val="000000"/>
                 </a:solidFill>
@@ -7541,7 +7565,7 @@
               <a:t> </a:t>
             </a:r>
             <a:r>
-              <a:rPr lang="en-US" altLang="zh-CN" sz="1800" kern="0" dirty="0">
+              <a:rPr lang="en-US" altLang="zh-CN" sz="1400" kern="0" dirty="0">
                 <a:solidFill>
                   <a:srgbClr val="001080"/>
                 </a:solidFill>
@@ -7553,7 +7577,7 @@
               <a:t>numbers1</a:t>
             </a:r>
             <a:r>
-              <a:rPr lang="en-US" altLang="zh-CN" sz="1800" kern="0" dirty="0">
+              <a:rPr lang="en-US" altLang="zh-CN" sz="1400" kern="0" dirty="0">
                 <a:solidFill>
                   <a:srgbClr val="0000FF"/>
                 </a:solidFill>
@@ -7565,7 +7589,7 @@
               <a:t>[]</a:t>
             </a:r>
             <a:r>
-              <a:rPr lang="en-US" altLang="zh-CN" sz="1800" kern="0" dirty="0">
+              <a:rPr lang="en-US" altLang="zh-CN" sz="1400" kern="0" dirty="0">
                 <a:solidFill>
                   <a:srgbClr val="000000"/>
                 </a:solidFill>
@@ -7577,7 +7601,7 @@
               <a:t> = {</a:t>
             </a:r>
             <a:r>
-              <a:rPr lang="en-US" altLang="zh-CN" sz="1800" kern="0" dirty="0">
+              <a:rPr lang="en-US" altLang="zh-CN" sz="1400" kern="0" dirty="0">
                 <a:solidFill>
                   <a:srgbClr val="098658"/>
                 </a:solidFill>
@@ -7589,7 +7613,7 @@
               <a:t>2</a:t>
             </a:r>
             <a:r>
-              <a:rPr lang="en-US" altLang="zh-CN" sz="1800" kern="0" dirty="0">
+              <a:rPr lang="en-US" altLang="zh-CN" sz="1400" kern="0" dirty="0">
                 <a:solidFill>
                   <a:srgbClr val="000000"/>
                 </a:solidFill>
@@ -7601,7 +7625,7 @@
               <a:t>,</a:t>
             </a:r>
             <a:r>
-              <a:rPr lang="en-US" altLang="zh-CN" sz="1800" kern="0" dirty="0">
+              <a:rPr lang="en-US" altLang="zh-CN" sz="1400" kern="0" dirty="0">
                 <a:solidFill>
                   <a:srgbClr val="098658"/>
                 </a:solidFill>
@@ -7613,7 +7637,7 @@
               <a:t>4</a:t>
             </a:r>
             <a:r>
-              <a:rPr lang="en-US" altLang="zh-CN" sz="1800" kern="0" dirty="0">
+              <a:rPr lang="en-US" altLang="zh-CN" sz="1400" kern="0" dirty="0">
                 <a:solidFill>
                   <a:srgbClr val="000000"/>
                 </a:solidFill>
@@ -7625,7 +7649,7 @@
               <a:t>,</a:t>
             </a:r>
             <a:r>
-              <a:rPr lang="en-US" altLang="zh-CN" sz="1800" kern="0" dirty="0">
+              <a:rPr lang="en-US" altLang="zh-CN" sz="1400" kern="0" dirty="0">
                 <a:solidFill>
                   <a:srgbClr val="098658"/>
                 </a:solidFill>
@@ -7637,7 +7661,7 @@
               <a:t>6</a:t>
             </a:r>
             <a:r>
-              <a:rPr lang="en-US" altLang="zh-CN" sz="1800" kern="0" dirty="0">
+              <a:rPr lang="en-US" altLang="zh-CN" sz="1400" kern="0" dirty="0">
                 <a:solidFill>
                   <a:srgbClr val="000000"/>
                 </a:solidFill>
@@ -7649,7 +7673,7 @@
               <a:t>,</a:t>
             </a:r>
             <a:r>
-              <a:rPr lang="en-US" altLang="zh-CN" sz="1800" kern="0" dirty="0">
+              <a:rPr lang="en-US" altLang="zh-CN" sz="1400" kern="0" dirty="0">
                 <a:solidFill>
                   <a:srgbClr val="098658"/>
                 </a:solidFill>
@@ -7661,7 +7685,7 @@
               <a:t>8</a:t>
             </a:r>
             <a:r>
-              <a:rPr lang="en-US" altLang="zh-CN" sz="1800" kern="0" dirty="0">
+              <a:rPr lang="en-US" altLang="zh-CN" sz="1400" kern="0" dirty="0">
                 <a:solidFill>
                   <a:srgbClr val="000000"/>
                 </a:solidFill>
@@ -7673,7 +7697,7 @@
               <a:t>,</a:t>
             </a:r>
             <a:r>
-              <a:rPr lang="en-US" altLang="zh-CN" sz="1800" kern="0" dirty="0">
+              <a:rPr lang="en-US" altLang="zh-CN" sz="1400" kern="0" dirty="0">
                 <a:solidFill>
                   <a:srgbClr val="098658"/>
                 </a:solidFill>
@@ -7685,7 +7709,7 @@
               <a:t>10</a:t>
             </a:r>
             <a:r>
-              <a:rPr lang="en-US" altLang="zh-CN" sz="1800" kern="0" dirty="0">
+              <a:rPr lang="en-US" altLang="zh-CN" sz="1400" kern="0" dirty="0">
                 <a:solidFill>
                   <a:srgbClr val="000000"/>
                 </a:solidFill>
@@ -7696,7 +7720,7 @@
               </a:rPr>
               <a:t>};</a:t>
             </a:r>
-            <a:endParaRPr lang="zh-CN" altLang="zh-CN" sz="1800" kern="100" dirty="0">
+            <a:endParaRPr lang="zh-CN" altLang="zh-CN" sz="1400" kern="100" dirty="0">
               <a:effectLst/>
               <a:latin typeface="DengXian" panose="02010600030101010101" pitchFamily="2" charset="-122"/>
               <a:ea typeface="DengXian" panose="02010600030101010101" pitchFamily="2" charset="-122"/>
@@ -7706,7 +7730,7 @@
           <a:p>
             <a:pPr algn="l"/>
             <a:r>
-              <a:rPr lang="en-US" altLang="zh-CN" sz="1800" kern="0" dirty="0">
+              <a:rPr lang="en-US" altLang="zh-CN" sz="1400" kern="0" dirty="0">
                 <a:solidFill>
                   <a:srgbClr val="000000"/>
                 </a:solidFill>
@@ -7718,7 +7742,7 @@
               <a:t>    </a:t>
             </a:r>
             <a:r>
-              <a:rPr lang="en-US" altLang="zh-CN" sz="1800" kern="0" dirty="0">
+              <a:rPr lang="en-US" altLang="zh-CN" sz="1400" kern="0" dirty="0">
                 <a:solidFill>
                   <a:srgbClr val="0000FF"/>
                 </a:solidFill>
@@ -7730,7 +7754,7 @@
               <a:t>int</a:t>
             </a:r>
             <a:r>
-              <a:rPr lang="en-US" altLang="zh-CN" sz="1800" kern="0" dirty="0">
+              <a:rPr lang="en-US" altLang="zh-CN" sz="1400" kern="0" dirty="0">
                 <a:solidFill>
                   <a:srgbClr val="000000"/>
                 </a:solidFill>
@@ -7742,7 +7766,7 @@
               <a:t> </a:t>
             </a:r>
             <a:r>
-              <a:rPr lang="en-US" altLang="zh-CN" sz="1800" kern="0" dirty="0">
+              <a:rPr lang="en-US" altLang="zh-CN" sz="1400" kern="0" dirty="0">
                 <a:solidFill>
                   <a:srgbClr val="001080"/>
                 </a:solidFill>
@@ -7754,7 +7778,7 @@
               <a:t>sum</a:t>
             </a:r>
             <a:r>
-              <a:rPr lang="en-US" altLang="zh-CN" sz="1800" kern="0" dirty="0">
+              <a:rPr lang="en-US" altLang="zh-CN" sz="1400" kern="0" dirty="0">
                 <a:solidFill>
                   <a:srgbClr val="000000"/>
                 </a:solidFill>
@@ -7766,7 +7790,7 @@
               <a:t> = </a:t>
             </a:r>
             <a:r>
-              <a:rPr lang="en-US" altLang="zh-CN" sz="1800" kern="0" dirty="0">
+              <a:rPr lang="en-US" altLang="zh-CN" sz="1400" kern="0" dirty="0">
                 <a:solidFill>
                   <a:srgbClr val="098658"/>
                 </a:solidFill>
@@ -7778,7 +7802,7 @@
               <a:t>0</a:t>
             </a:r>
             <a:r>
-              <a:rPr lang="en-US" altLang="zh-CN" sz="1800" kern="0" dirty="0">
+              <a:rPr lang="en-US" altLang="zh-CN" sz="1400" kern="0" dirty="0">
                 <a:solidFill>
                   <a:srgbClr val="000000"/>
                 </a:solidFill>
@@ -7789,7 +7813,7 @@
               </a:rPr>
               <a:t>;</a:t>
             </a:r>
-            <a:endParaRPr lang="zh-CN" altLang="zh-CN" sz="1800" kern="100" dirty="0">
+            <a:endParaRPr lang="zh-CN" altLang="zh-CN" sz="1400" kern="100" dirty="0">
               <a:effectLst/>
               <a:latin typeface="DengXian" panose="02010600030101010101" pitchFamily="2" charset="-122"/>
               <a:ea typeface="DengXian" panose="02010600030101010101" pitchFamily="2" charset="-122"/>
@@ -7799,7 +7823,7 @@
           <a:p>
             <a:pPr algn="l"/>
             <a:r>
-              <a:rPr lang="en-US" altLang="zh-CN" sz="1800" kern="0" dirty="0">
+              <a:rPr lang="en-US" altLang="zh-CN" sz="1400" kern="0" dirty="0">
                 <a:solidFill>
                   <a:srgbClr val="000000"/>
                 </a:solidFill>
@@ -7811,7 +7835,7 @@
               <a:t>    </a:t>
             </a:r>
             <a:r>
-              <a:rPr lang="en-US" altLang="zh-CN" sz="1800" kern="0" dirty="0">
+              <a:rPr lang="en-US" altLang="zh-CN" sz="1400" kern="0" dirty="0">
                 <a:solidFill>
                   <a:srgbClr val="0000FF"/>
                 </a:solidFill>
@@ -7823,7 +7847,7 @@
               <a:t>int</a:t>
             </a:r>
             <a:r>
-              <a:rPr lang="en-US" altLang="zh-CN" sz="1800" kern="0" dirty="0">
+              <a:rPr lang="en-US" altLang="zh-CN" sz="1400" kern="0" dirty="0">
                 <a:solidFill>
                   <a:srgbClr val="000000"/>
                 </a:solidFill>
@@ -7835,7 +7859,7 @@
               <a:t> *</a:t>
             </a:r>
             <a:r>
-              <a:rPr lang="en-US" altLang="zh-CN" sz="1800" kern="0" dirty="0">
+              <a:rPr lang="en-US" altLang="zh-CN" sz="1400" kern="0" dirty="0">
                 <a:solidFill>
                   <a:srgbClr val="001080"/>
                 </a:solidFill>
@@ -7847,7 +7871,7 @@
               <a:t>p1</a:t>
             </a:r>
             <a:r>
-              <a:rPr lang="en-US" altLang="zh-CN" sz="1800" kern="0" dirty="0">
+              <a:rPr lang="en-US" altLang="zh-CN" sz="1400" kern="0" dirty="0">
                 <a:solidFill>
                   <a:srgbClr val="000000"/>
                 </a:solidFill>
@@ -7859,7 +7883,7 @@
               <a:t> = &amp;</a:t>
             </a:r>
             <a:r>
-              <a:rPr lang="en-US" altLang="zh-CN" sz="1800" kern="0" dirty="0">
+              <a:rPr lang="en-US" altLang="zh-CN" sz="1400" kern="0" dirty="0">
                 <a:solidFill>
                   <a:srgbClr val="001080"/>
                 </a:solidFill>
@@ -7871,7 +7895,7 @@
               <a:t>numbers1</a:t>
             </a:r>
             <a:r>
-              <a:rPr lang="en-US" altLang="zh-CN" sz="1800" kern="0" dirty="0">
+              <a:rPr lang="en-US" altLang="zh-CN" sz="1400" kern="0" dirty="0">
                 <a:solidFill>
                   <a:srgbClr val="000000"/>
                 </a:solidFill>
@@ -7883,7 +7907,7 @@
               <a:t>[</a:t>
             </a:r>
             <a:r>
-              <a:rPr lang="en-US" altLang="zh-CN" sz="1800" kern="0" dirty="0">
+              <a:rPr lang="en-US" altLang="zh-CN" sz="1400" kern="0" dirty="0">
                 <a:solidFill>
                   <a:srgbClr val="098658"/>
                 </a:solidFill>
@@ -7895,7 +7919,7 @@
               <a:t>1</a:t>
             </a:r>
             <a:r>
-              <a:rPr lang="en-US" altLang="zh-CN" sz="1800" kern="0" dirty="0">
+              <a:rPr lang="en-US" altLang="zh-CN" sz="1400" kern="0" dirty="0">
                 <a:solidFill>
                   <a:srgbClr val="000000"/>
                 </a:solidFill>
@@ -7906,7 +7930,7 @@
               </a:rPr>
               <a:t>];</a:t>
             </a:r>
-            <a:endParaRPr lang="zh-CN" altLang="zh-CN" sz="1800" kern="100" dirty="0">
+            <a:endParaRPr lang="zh-CN" altLang="zh-CN" sz="1400" kern="100" dirty="0">
               <a:effectLst/>
               <a:latin typeface="DengXian" panose="02010600030101010101" pitchFamily="2" charset="-122"/>
               <a:ea typeface="DengXian" panose="02010600030101010101" pitchFamily="2" charset="-122"/>
@@ -7916,7 +7940,7 @@
           <a:p>
             <a:pPr algn="l"/>
             <a:r>
-              <a:rPr lang="en-US" altLang="zh-CN" sz="1800" kern="0" dirty="0">
+              <a:rPr lang="en-US" altLang="zh-CN" sz="1400" kern="0" dirty="0">
                 <a:solidFill>
                   <a:srgbClr val="000000"/>
                 </a:solidFill>
@@ -7928,7 +7952,7 @@
               <a:t>    </a:t>
             </a:r>
             <a:r>
-              <a:rPr lang="en-US" altLang="zh-CN" sz="1800" kern="0" dirty="0" err="1">
+              <a:rPr lang="en-US" altLang="zh-CN" sz="1400" kern="0" dirty="0" err="1">
                 <a:solidFill>
                   <a:srgbClr val="795E26"/>
                 </a:solidFill>
@@ -7940,7 +7964,7 @@
               <a:t>printf</a:t>
             </a:r>
             <a:r>
-              <a:rPr lang="en-US" altLang="zh-CN" sz="1800" kern="0" dirty="0">
+              <a:rPr lang="en-US" altLang="zh-CN" sz="1400" kern="0" dirty="0">
                 <a:solidFill>
                   <a:srgbClr val="000000"/>
                 </a:solidFill>
@@ -7952,7 +7976,7 @@
               <a:t>(</a:t>
             </a:r>
             <a:r>
-              <a:rPr lang="en-US" altLang="zh-CN" sz="1800" kern="0" dirty="0">
+              <a:rPr lang="en-US" altLang="zh-CN" sz="1400" kern="0" dirty="0">
                 <a:solidFill>
                   <a:srgbClr val="A31515"/>
                 </a:solidFill>
@@ -7964,7 +7988,7 @@
               <a:t>"numbers1 = </a:t>
             </a:r>
             <a:r>
-              <a:rPr lang="en-US" altLang="zh-CN" sz="1800" kern="0" dirty="0">
+              <a:rPr lang="en-US" altLang="zh-CN" sz="1400" kern="0" dirty="0">
                 <a:solidFill>
                   <a:srgbClr val="001080"/>
                 </a:solidFill>
@@ -7976,7 +8000,7 @@
               <a:t>%p</a:t>
             </a:r>
             <a:r>
-              <a:rPr lang="en-US" altLang="zh-CN" sz="1800" kern="0" dirty="0">
+              <a:rPr lang="en-US" altLang="zh-CN" sz="1400" kern="0" dirty="0">
                 <a:solidFill>
                   <a:srgbClr val="EE0000"/>
                 </a:solidFill>
@@ -7988,7 +8012,7 @@
               <a:t>\n</a:t>
             </a:r>
             <a:r>
-              <a:rPr lang="en-US" altLang="zh-CN" sz="1800" kern="0" dirty="0">
+              <a:rPr lang="en-US" altLang="zh-CN" sz="1400" kern="0" dirty="0">
                 <a:solidFill>
                   <a:srgbClr val="A31515"/>
                 </a:solidFill>
@@ -8000,7 +8024,7 @@
               <a:t>"</a:t>
             </a:r>
             <a:r>
-              <a:rPr lang="en-US" altLang="zh-CN" sz="1800" kern="0" dirty="0">
+              <a:rPr lang="en-US" altLang="zh-CN" sz="1400" kern="0" dirty="0">
                 <a:solidFill>
                   <a:srgbClr val="000000"/>
                 </a:solidFill>
@@ -8012,7 +8036,7 @@
               <a:t>, </a:t>
             </a:r>
             <a:r>
-              <a:rPr lang="en-US" altLang="zh-CN" sz="1800" kern="0" dirty="0">
+              <a:rPr lang="en-US" altLang="zh-CN" sz="1400" kern="0" dirty="0">
                 <a:solidFill>
                   <a:srgbClr val="001080"/>
                 </a:solidFill>
@@ -8024,7 +8048,7 @@
               <a:t>numbers1</a:t>
             </a:r>
             <a:r>
-              <a:rPr lang="en-US" altLang="zh-CN" sz="1800" kern="0" dirty="0">
+              <a:rPr lang="en-US" altLang="zh-CN" sz="1400" kern="0" dirty="0">
                 <a:solidFill>
                   <a:srgbClr val="000000"/>
                 </a:solidFill>
@@ -8035,7 +8059,7 @@
               </a:rPr>
               <a:t>);</a:t>
             </a:r>
-            <a:endParaRPr lang="zh-CN" altLang="zh-CN" sz="1800" kern="100" dirty="0">
+            <a:endParaRPr lang="zh-CN" altLang="zh-CN" sz="1400" kern="100" dirty="0">
               <a:effectLst/>
               <a:latin typeface="DengXian" panose="02010600030101010101" pitchFamily="2" charset="-122"/>
               <a:ea typeface="DengXian" panose="02010600030101010101" pitchFamily="2" charset="-122"/>
@@ -8045,7 +8069,7 @@
           <a:p>
             <a:pPr algn="l"/>
             <a:r>
-              <a:rPr lang="en-US" altLang="zh-CN" sz="1800" kern="0" dirty="0">
+              <a:rPr lang="en-US" altLang="zh-CN" sz="1400" kern="0" dirty="0">
                 <a:solidFill>
                   <a:srgbClr val="000000"/>
                 </a:solidFill>
@@ -8057,7 +8081,7 @@
               <a:t>    </a:t>
             </a:r>
             <a:r>
-              <a:rPr lang="en-US" altLang="zh-CN" sz="1800" kern="0" dirty="0" err="1">
+              <a:rPr lang="en-US" altLang="zh-CN" sz="1400" kern="0" dirty="0" err="1">
                 <a:solidFill>
                   <a:srgbClr val="795E26"/>
                 </a:solidFill>
@@ -8069,7 +8093,7 @@
               <a:t>printf</a:t>
             </a:r>
             <a:r>
-              <a:rPr lang="en-US" altLang="zh-CN" sz="1800" kern="0" dirty="0">
+              <a:rPr lang="en-US" altLang="zh-CN" sz="1400" kern="0" dirty="0">
                 <a:solidFill>
                   <a:srgbClr val="000000"/>
                 </a:solidFill>
@@ -8081,7 +8105,7 @@
               <a:t>(</a:t>
             </a:r>
             <a:r>
-              <a:rPr lang="en-US" altLang="zh-CN" sz="1800" kern="0" dirty="0">
+              <a:rPr lang="en-US" altLang="zh-CN" sz="1400" kern="0" dirty="0">
                 <a:solidFill>
                   <a:srgbClr val="A31515"/>
                 </a:solidFill>
@@ -8093,7 +8117,7 @@
               <a:t>"p1       = </a:t>
             </a:r>
             <a:r>
-              <a:rPr lang="en-US" altLang="zh-CN" sz="1800" kern="0" dirty="0">
+              <a:rPr lang="en-US" altLang="zh-CN" sz="1400" kern="0" dirty="0">
                 <a:solidFill>
                   <a:srgbClr val="001080"/>
                 </a:solidFill>
@@ -8105,7 +8129,7 @@
               <a:t>%p</a:t>
             </a:r>
             <a:r>
-              <a:rPr lang="en-US" altLang="zh-CN" sz="1800" kern="0" dirty="0">
+              <a:rPr lang="en-US" altLang="zh-CN" sz="1400" kern="0" dirty="0">
                 <a:solidFill>
                   <a:srgbClr val="EE0000"/>
                 </a:solidFill>
@@ -8117,7 +8141,7 @@
               <a:t>\n</a:t>
             </a:r>
             <a:r>
-              <a:rPr lang="en-US" altLang="zh-CN" sz="1800" kern="0" dirty="0">
+              <a:rPr lang="en-US" altLang="zh-CN" sz="1400" kern="0" dirty="0">
                 <a:solidFill>
                   <a:srgbClr val="A31515"/>
                 </a:solidFill>
@@ -8129,7 +8153,7 @@
               <a:t>"</a:t>
             </a:r>
             <a:r>
-              <a:rPr lang="en-US" altLang="zh-CN" sz="1800" kern="0" dirty="0">
+              <a:rPr lang="en-US" altLang="zh-CN" sz="1400" kern="0" dirty="0">
                 <a:solidFill>
                   <a:srgbClr val="000000"/>
                 </a:solidFill>
@@ -8141,7 +8165,7 @@
               <a:t>, </a:t>
             </a:r>
             <a:r>
-              <a:rPr lang="en-US" altLang="zh-CN" sz="1800" kern="0" dirty="0">
+              <a:rPr lang="en-US" altLang="zh-CN" sz="1400" kern="0" dirty="0">
                 <a:solidFill>
                   <a:srgbClr val="001080"/>
                 </a:solidFill>
@@ -8153,7 +8177,7 @@
               <a:t>p1</a:t>
             </a:r>
             <a:r>
-              <a:rPr lang="en-US" altLang="zh-CN" sz="1800" kern="0" dirty="0">
+              <a:rPr lang="en-US" altLang="zh-CN" sz="1400" kern="0" dirty="0">
                 <a:solidFill>
                   <a:srgbClr val="000000"/>
                 </a:solidFill>
@@ -8164,7 +8188,7 @@
               </a:rPr>
               <a:t>);</a:t>
             </a:r>
-            <a:endParaRPr lang="zh-CN" altLang="zh-CN" sz="1800" kern="100" dirty="0">
+            <a:endParaRPr lang="zh-CN" altLang="zh-CN" sz="1400" kern="100" dirty="0">
               <a:effectLst/>
               <a:latin typeface="DengXian" panose="02010600030101010101" pitchFamily="2" charset="-122"/>
               <a:ea typeface="DengXian" panose="02010600030101010101" pitchFamily="2" charset="-122"/>
@@ -8174,7 +8198,7 @@
           <a:p>
             <a:pPr algn="l"/>
             <a:r>
-              <a:rPr lang="en-US" altLang="zh-CN" sz="1800" kern="0" dirty="0">
+              <a:rPr lang="en-US" altLang="zh-CN" sz="1400" kern="0" dirty="0">
                 <a:solidFill>
                   <a:srgbClr val="000000"/>
                 </a:solidFill>
@@ -8186,7 +8210,7 @@
               <a:t>    </a:t>
             </a:r>
             <a:r>
-              <a:rPr lang="en-US" altLang="zh-CN" sz="1800" kern="0" dirty="0">
+              <a:rPr lang="en-US" altLang="zh-CN" sz="1400" kern="0" dirty="0">
                 <a:solidFill>
                   <a:srgbClr val="AF00DB"/>
                 </a:solidFill>
@@ -8198,7 +8222,7 @@
               <a:t>for</a:t>
             </a:r>
             <a:r>
-              <a:rPr lang="en-US" altLang="zh-CN" sz="1800" kern="0" dirty="0">
+              <a:rPr lang="en-US" altLang="zh-CN" sz="1400" kern="0" dirty="0">
                 <a:solidFill>
                   <a:srgbClr val="000000"/>
                 </a:solidFill>
@@ -8210,7 +8234,7 @@
               <a:t>(</a:t>
             </a:r>
             <a:r>
-              <a:rPr lang="en-US" altLang="zh-CN" sz="1800" kern="0" dirty="0">
+              <a:rPr lang="en-US" altLang="zh-CN" sz="1400" kern="0" dirty="0">
                 <a:solidFill>
                   <a:srgbClr val="0000FF"/>
                 </a:solidFill>
@@ -8222,7 +8246,7 @@
               <a:t>int</a:t>
             </a:r>
             <a:r>
-              <a:rPr lang="en-US" altLang="zh-CN" sz="1800" kern="0" dirty="0">
+              <a:rPr lang="en-US" altLang="zh-CN" sz="1400" kern="0" dirty="0">
                 <a:solidFill>
                   <a:srgbClr val="000000"/>
                 </a:solidFill>
@@ -8234,7 +8258,7 @@
               <a:t> </a:t>
             </a:r>
             <a:r>
-              <a:rPr lang="en-US" altLang="zh-CN" sz="1800" kern="0" dirty="0" err="1">
+              <a:rPr lang="en-US" altLang="zh-CN" sz="1400" kern="0" dirty="0" err="1">
                 <a:solidFill>
                   <a:srgbClr val="001080"/>
                 </a:solidFill>
@@ -8246,7 +8270,7 @@
               <a:t>i</a:t>
             </a:r>
             <a:r>
-              <a:rPr lang="en-US" altLang="zh-CN" sz="1800" kern="0" dirty="0">
+              <a:rPr lang="en-US" altLang="zh-CN" sz="1400" kern="0" dirty="0">
                 <a:solidFill>
                   <a:srgbClr val="000000"/>
                 </a:solidFill>
@@ -8258,7 +8282,7 @@
               <a:t> = </a:t>
             </a:r>
             <a:r>
-              <a:rPr lang="en-US" altLang="zh-CN" sz="1800" kern="0" dirty="0">
+              <a:rPr lang="en-US" altLang="zh-CN" sz="1400" kern="0" dirty="0">
                 <a:solidFill>
                   <a:srgbClr val="098658"/>
                 </a:solidFill>
@@ -8270,7 +8294,7 @@
               <a:t>0</a:t>
             </a:r>
             <a:r>
-              <a:rPr lang="en-US" altLang="zh-CN" sz="1800" kern="0" dirty="0">
+              <a:rPr lang="en-US" altLang="zh-CN" sz="1400" kern="0" dirty="0">
                 <a:solidFill>
                   <a:srgbClr val="000000"/>
                 </a:solidFill>
@@ -8282,7 +8306,7 @@
               <a:t>; </a:t>
             </a:r>
             <a:r>
-              <a:rPr lang="en-US" altLang="zh-CN" sz="1800" kern="0" dirty="0" err="1">
+              <a:rPr lang="en-US" altLang="zh-CN" sz="1400" kern="0" dirty="0" err="1">
                 <a:solidFill>
                   <a:srgbClr val="001080"/>
                 </a:solidFill>
@@ -8294,7 +8318,7 @@
               <a:t>i</a:t>
             </a:r>
             <a:r>
-              <a:rPr lang="en-US" altLang="zh-CN" sz="1800" kern="0" dirty="0">
+              <a:rPr lang="en-US" altLang="zh-CN" sz="1400" kern="0" dirty="0">
                 <a:solidFill>
                   <a:srgbClr val="000000"/>
                 </a:solidFill>
@@ -8306,7 +8330,7 @@
               <a:t> &lt; </a:t>
             </a:r>
             <a:r>
-              <a:rPr lang="en-US" altLang="zh-CN" sz="1800" kern="0" dirty="0">
+              <a:rPr lang="en-US" altLang="zh-CN" sz="1400" kern="0" dirty="0">
                 <a:solidFill>
                   <a:srgbClr val="098658"/>
                 </a:solidFill>
@@ -8318,7 +8342,7 @@
               <a:t>3</a:t>
             </a:r>
             <a:r>
-              <a:rPr lang="en-US" altLang="zh-CN" sz="1800" kern="0" dirty="0">
+              <a:rPr lang="en-US" altLang="zh-CN" sz="1400" kern="0" dirty="0">
                 <a:solidFill>
                   <a:srgbClr val="000000"/>
                 </a:solidFill>
@@ -8330,7 +8354,7 @@
               <a:t>; </a:t>
             </a:r>
             <a:r>
-              <a:rPr lang="en-US" altLang="zh-CN" sz="1800" kern="0" dirty="0" err="1">
+              <a:rPr lang="en-US" altLang="zh-CN" sz="1400" kern="0" dirty="0" err="1">
                 <a:solidFill>
                   <a:srgbClr val="001080"/>
                 </a:solidFill>
@@ -8342,7 +8366,7 @@
               <a:t>i</a:t>
             </a:r>
             <a:r>
-              <a:rPr lang="en-US" altLang="zh-CN" sz="1800" kern="0" dirty="0">
+              <a:rPr lang="en-US" altLang="zh-CN" sz="1400" kern="0" dirty="0">
                 <a:solidFill>
                   <a:srgbClr val="000000"/>
                 </a:solidFill>
@@ -8353,7 +8377,7 @@
               </a:rPr>
               <a:t>++) </a:t>
             </a:r>
-            <a:endParaRPr lang="zh-CN" altLang="zh-CN" sz="1800" kern="100" dirty="0">
+            <a:endParaRPr lang="zh-CN" altLang="zh-CN" sz="1400" kern="100" dirty="0">
               <a:effectLst/>
               <a:latin typeface="DengXian" panose="02010600030101010101" pitchFamily="2" charset="-122"/>
               <a:ea typeface="DengXian" panose="02010600030101010101" pitchFamily="2" charset="-122"/>
@@ -8363,7 +8387,7 @@
           <a:p>
             <a:pPr algn="l"/>
             <a:r>
-              <a:rPr lang="en-US" altLang="zh-CN" sz="1800" kern="0" dirty="0">
+              <a:rPr lang="en-US" altLang="zh-CN" sz="1400" kern="0" dirty="0">
                 <a:solidFill>
                   <a:srgbClr val="000000"/>
                 </a:solidFill>
@@ -8375,7 +8399,7 @@
               <a:t>        </a:t>
             </a:r>
             <a:r>
-              <a:rPr lang="en-US" altLang="zh-CN" sz="1800" kern="0" dirty="0">
+              <a:rPr lang="en-US" altLang="zh-CN" sz="1400" kern="0" dirty="0">
                 <a:solidFill>
                   <a:srgbClr val="001080"/>
                 </a:solidFill>
@@ -8387,7 +8411,7 @@
               <a:t>sum</a:t>
             </a:r>
             <a:r>
-              <a:rPr lang="en-US" altLang="zh-CN" sz="1800" kern="0" dirty="0">
+              <a:rPr lang="en-US" altLang="zh-CN" sz="1400" kern="0" dirty="0">
                 <a:solidFill>
                   <a:srgbClr val="000000"/>
                 </a:solidFill>
@@ -8399,7 +8423,7 @@
               <a:t> += *(</a:t>
             </a:r>
             <a:r>
-              <a:rPr lang="en-US" altLang="zh-CN" sz="1800" kern="0" dirty="0">
+              <a:rPr lang="en-US" altLang="zh-CN" sz="1400" kern="0" dirty="0">
                 <a:solidFill>
                   <a:srgbClr val="001080"/>
                 </a:solidFill>
@@ -8411,7 +8435,7 @@
               <a:t>p1</a:t>
             </a:r>
             <a:r>
-              <a:rPr lang="en-US" altLang="zh-CN" sz="1800" kern="0" dirty="0">
+              <a:rPr lang="en-US" altLang="zh-CN" sz="1400" kern="0" dirty="0">
                 <a:solidFill>
                   <a:srgbClr val="000000"/>
                 </a:solidFill>
@@ -8423,7 +8447,7 @@
               <a:t>+</a:t>
             </a:r>
             <a:r>
-              <a:rPr lang="en-US" altLang="zh-CN" sz="1800" kern="0" dirty="0">
+              <a:rPr lang="en-US" altLang="zh-CN" sz="1400" kern="0" dirty="0">
                 <a:solidFill>
                   <a:srgbClr val="001080"/>
                 </a:solidFill>
@@ -8435,7 +8459,7 @@
               <a:t>i</a:t>
             </a:r>
             <a:r>
-              <a:rPr lang="en-US" altLang="zh-CN" sz="1800" kern="0" dirty="0">
+              <a:rPr lang="en-US" altLang="zh-CN" sz="1400" kern="0" dirty="0">
                 <a:solidFill>
                   <a:srgbClr val="000000"/>
                 </a:solidFill>
@@ -8446,7 +8470,7 @@
               </a:rPr>
               <a:t>);</a:t>
             </a:r>
-            <a:endParaRPr lang="zh-CN" altLang="zh-CN" sz="1800" kern="100" dirty="0">
+            <a:endParaRPr lang="zh-CN" altLang="zh-CN" sz="1400" kern="100" dirty="0">
               <a:effectLst/>
               <a:latin typeface="DengXian" panose="02010600030101010101" pitchFamily="2" charset="-122"/>
               <a:ea typeface="DengXian" panose="02010600030101010101" pitchFamily="2" charset="-122"/>
@@ -8456,7 +8480,7 @@
           <a:p>
             <a:pPr algn="l"/>
             <a:r>
-              <a:rPr lang="en-US" altLang="zh-CN" sz="1800" kern="0" dirty="0">
+              <a:rPr lang="en-US" altLang="zh-CN" sz="1400" kern="0" dirty="0">
                 <a:solidFill>
                   <a:srgbClr val="000000"/>
                 </a:solidFill>
@@ -8468,7 +8492,7 @@
               <a:t>    </a:t>
             </a:r>
             <a:r>
-              <a:rPr lang="en-US" altLang="zh-CN" sz="1800" kern="0" dirty="0" err="1">
+              <a:rPr lang="en-US" altLang="zh-CN" sz="1400" kern="0" dirty="0" err="1">
                 <a:solidFill>
                   <a:srgbClr val="795E26"/>
                 </a:solidFill>
@@ -8480,7 +8504,7 @@
               <a:t>printf</a:t>
             </a:r>
             <a:r>
-              <a:rPr lang="en-US" altLang="zh-CN" sz="1800" kern="0" dirty="0">
+              <a:rPr lang="en-US" altLang="zh-CN" sz="1400" kern="0" dirty="0">
                 <a:solidFill>
                   <a:srgbClr val="000000"/>
                 </a:solidFill>
@@ -8492,7 +8516,7 @@
               <a:t>(</a:t>
             </a:r>
             <a:r>
-              <a:rPr lang="en-US" altLang="zh-CN" sz="1800" kern="0" dirty="0">
+              <a:rPr lang="en-US" altLang="zh-CN" sz="1400" kern="0" dirty="0">
                 <a:solidFill>
                   <a:srgbClr val="A31515"/>
                 </a:solidFill>
@@ -8504,7 +8528,7 @@
               <a:t>"sum      = </a:t>
             </a:r>
             <a:r>
-              <a:rPr lang="en-US" altLang="zh-CN" sz="1800" kern="0" dirty="0">
+              <a:rPr lang="en-US" altLang="zh-CN" sz="1400" kern="0" dirty="0">
                 <a:solidFill>
                   <a:srgbClr val="001080"/>
                 </a:solidFill>
@@ -8516,7 +8540,7 @@
               <a:t>%d</a:t>
             </a:r>
             <a:r>
-              <a:rPr lang="en-US" altLang="zh-CN" sz="1800" kern="0" dirty="0">
+              <a:rPr lang="en-US" altLang="zh-CN" sz="1400" kern="0" dirty="0">
                 <a:solidFill>
                   <a:srgbClr val="EE0000"/>
                 </a:solidFill>
@@ -8528,7 +8552,7 @@
               <a:t>\</a:t>
             </a:r>
             <a:r>
-              <a:rPr lang="en-US" altLang="zh-CN" sz="1800" kern="0" dirty="0" err="1">
+              <a:rPr lang="en-US" altLang="zh-CN" sz="1400" kern="0" dirty="0" err="1">
                 <a:solidFill>
                   <a:srgbClr val="EE0000"/>
                 </a:solidFill>
@@ -8540,7 +8564,7 @@
               <a:t>n</a:t>
             </a:r>
             <a:r>
-              <a:rPr lang="en-US" altLang="zh-CN" sz="1800" kern="0" dirty="0" err="1">
+              <a:rPr lang="en-US" altLang="zh-CN" sz="1400" kern="0" dirty="0" err="1">
                 <a:solidFill>
                   <a:srgbClr val="A31515"/>
                 </a:solidFill>
@@ -8552,7 +8576,7 @@
               <a:t>"</a:t>
             </a:r>
             <a:r>
-              <a:rPr lang="en-US" altLang="zh-CN" sz="1800" kern="0" dirty="0" err="1">
+              <a:rPr lang="en-US" altLang="zh-CN" sz="1400" kern="0" dirty="0" err="1">
                 <a:solidFill>
                   <a:srgbClr val="000000"/>
                 </a:solidFill>
@@ -8564,7 +8588,7 @@
               <a:t>,</a:t>
             </a:r>
             <a:r>
-              <a:rPr lang="en-US" altLang="zh-CN" sz="1800" kern="0" dirty="0" err="1">
+              <a:rPr lang="en-US" altLang="zh-CN" sz="1400" kern="0" dirty="0" err="1">
                 <a:solidFill>
                   <a:srgbClr val="001080"/>
                 </a:solidFill>
@@ -8576,7 +8600,7 @@
               <a:t>sum</a:t>
             </a:r>
             <a:r>
-              <a:rPr lang="en-US" altLang="zh-CN" sz="1800" kern="0" dirty="0">
+              <a:rPr lang="en-US" altLang="zh-CN" sz="1400" kern="0" dirty="0">
                 <a:solidFill>
                   <a:srgbClr val="000000"/>
                 </a:solidFill>
@@ -8587,7 +8611,7 @@
               </a:rPr>
               <a:t>);</a:t>
             </a:r>
-            <a:endParaRPr lang="zh-CN" altLang="zh-CN" sz="1800" kern="100" dirty="0">
+            <a:endParaRPr lang="zh-CN" altLang="zh-CN" sz="1400" kern="100" dirty="0">
               <a:effectLst/>
               <a:latin typeface="DengXian" panose="02010600030101010101" pitchFamily="2" charset="-122"/>
               <a:ea typeface="DengXian" panose="02010600030101010101" pitchFamily="2" charset="-122"/>
@@ -8597,7 +8621,7 @@
           <a:p>
             <a:pPr algn="l"/>
             <a:r>
-              <a:rPr lang="en-US" altLang="zh-CN" sz="1800" kern="0" dirty="0">
+              <a:rPr lang="en-US" altLang="zh-CN" sz="1400" kern="0" dirty="0">
                 <a:solidFill>
                   <a:srgbClr val="000000"/>
                 </a:solidFill>
@@ -8608,7 +8632,7 @@
               </a:rPr>
               <a:t> </a:t>
             </a:r>
-            <a:endParaRPr lang="zh-CN" altLang="zh-CN" sz="1800" kern="100" dirty="0">
+            <a:endParaRPr lang="zh-CN" altLang="zh-CN" sz="1400" kern="100" dirty="0">
               <a:effectLst/>
               <a:latin typeface="DengXian" panose="02010600030101010101" pitchFamily="2" charset="-122"/>
               <a:ea typeface="DengXian" panose="02010600030101010101" pitchFamily="2" charset="-122"/>
@@ -8618,7 +8642,7 @@
           <a:p>
             <a:pPr algn="l"/>
             <a:r>
-              <a:rPr lang="en-US" altLang="zh-CN" sz="1800" kern="0" dirty="0">
+              <a:rPr lang="en-US" altLang="zh-CN" sz="1400" kern="0" dirty="0">
                 <a:solidFill>
                   <a:srgbClr val="000000"/>
                 </a:solidFill>
@@ -8630,7 +8654,7 @@
               <a:t>    </a:t>
             </a:r>
             <a:r>
-              <a:rPr lang="en-US" altLang="zh-CN" sz="1800" kern="0" dirty="0">
+              <a:rPr lang="en-US" altLang="zh-CN" sz="1400" kern="0" dirty="0">
                 <a:solidFill>
                   <a:srgbClr val="0000FF"/>
                 </a:solidFill>
@@ -8642,7 +8666,7 @@
               <a:t>int</a:t>
             </a:r>
             <a:r>
-              <a:rPr lang="en-US" altLang="zh-CN" sz="1800" kern="0" dirty="0">
+              <a:rPr lang="en-US" altLang="zh-CN" sz="1400" kern="0" dirty="0">
                 <a:solidFill>
                   <a:srgbClr val="000000"/>
                 </a:solidFill>
@@ -8654,7 +8678,7 @@
               <a:t> </a:t>
             </a:r>
             <a:r>
-              <a:rPr lang="en-US" altLang="zh-CN" sz="1800" kern="0" dirty="0">
+              <a:rPr lang="en-US" altLang="zh-CN" sz="1400" kern="0" dirty="0">
                 <a:solidFill>
                   <a:srgbClr val="001080"/>
                 </a:solidFill>
@@ -8666,7 +8690,7 @@
               <a:t>numbers2</a:t>
             </a:r>
             <a:r>
-              <a:rPr lang="en-US" altLang="zh-CN" sz="1800" kern="0" dirty="0">
+              <a:rPr lang="en-US" altLang="zh-CN" sz="1400" kern="0" dirty="0">
                 <a:solidFill>
                   <a:srgbClr val="000000"/>
                 </a:solidFill>
@@ -8678,7 +8702,7 @@
               <a:t>[</a:t>
             </a:r>
             <a:r>
-              <a:rPr lang="en-US" altLang="zh-CN" sz="1800" kern="0" dirty="0">
+              <a:rPr lang="en-US" altLang="zh-CN" sz="1400" kern="0" dirty="0">
                 <a:solidFill>
                   <a:srgbClr val="098658"/>
                 </a:solidFill>
@@ -8690,7 +8714,7 @@
               <a:t>5</a:t>
             </a:r>
             <a:r>
-              <a:rPr lang="en-US" altLang="zh-CN" sz="1800" kern="0" dirty="0">
+              <a:rPr lang="en-US" altLang="zh-CN" sz="1400" kern="0" dirty="0">
                 <a:solidFill>
                   <a:srgbClr val="000000"/>
                 </a:solidFill>
@@ -8702,7 +8726,7 @@
               <a:t>]={</a:t>
             </a:r>
             <a:r>
-              <a:rPr lang="en-US" altLang="zh-CN" sz="1800" kern="0" dirty="0">
+              <a:rPr lang="en-US" altLang="zh-CN" sz="1400" kern="0" dirty="0">
                 <a:solidFill>
                   <a:srgbClr val="098658"/>
                 </a:solidFill>
@@ -8714,7 +8738,7 @@
               <a:t>1</a:t>
             </a:r>
             <a:r>
-              <a:rPr lang="en-US" altLang="zh-CN" sz="1800" kern="0" dirty="0">
+              <a:rPr lang="en-US" altLang="zh-CN" sz="1400" kern="0" dirty="0">
                 <a:solidFill>
                   <a:srgbClr val="000000"/>
                 </a:solidFill>
@@ -8726,7 +8750,7 @@
               <a:t>,</a:t>
             </a:r>
             <a:r>
-              <a:rPr lang="en-US" altLang="zh-CN" sz="1800" kern="0" dirty="0">
+              <a:rPr lang="en-US" altLang="zh-CN" sz="1400" kern="0" dirty="0">
                 <a:solidFill>
                   <a:srgbClr val="098658"/>
                 </a:solidFill>
@@ -8738,7 +8762,7 @@
               <a:t>2</a:t>
             </a:r>
             <a:r>
-              <a:rPr lang="en-US" altLang="zh-CN" sz="1800" kern="0" dirty="0">
+              <a:rPr lang="en-US" altLang="zh-CN" sz="1400" kern="0" dirty="0">
                 <a:solidFill>
                   <a:srgbClr val="000000"/>
                 </a:solidFill>
@@ -8750,7 +8774,7 @@
               <a:t>,</a:t>
             </a:r>
             <a:r>
-              <a:rPr lang="en-US" altLang="zh-CN" sz="1800" kern="0" dirty="0">
+              <a:rPr lang="en-US" altLang="zh-CN" sz="1400" kern="0" dirty="0">
                 <a:solidFill>
                   <a:srgbClr val="098658"/>
                 </a:solidFill>
@@ -8762,7 +8786,7 @@
               <a:t>3</a:t>
             </a:r>
             <a:r>
-              <a:rPr lang="en-US" altLang="zh-CN" sz="1800" kern="0" dirty="0">
+              <a:rPr lang="en-US" altLang="zh-CN" sz="1400" kern="0" dirty="0">
                 <a:solidFill>
                   <a:srgbClr val="000000"/>
                 </a:solidFill>
@@ -8774,7 +8798,7 @@
               <a:t>,</a:t>
             </a:r>
             <a:r>
-              <a:rPr lang="en-US" altLang="zh-CN" sz="1800" kern="0" dirty="0">
+              <a:rPr lang="en-US" altLang="zh-CN" sz="1400" kern="0" dirty="0">
                 <a:solidFill>
                   <a:srgbClr val="098658"/>
                 </a:solidFill>
@@ -8786,7 +8810,7 @@
               <a:t>4</a:t>
             </a:r>
             <a:r>
-              <a:rPr lang="en-US" altLang="zh-CN" sz="1800" kern="0" dirty="0">
+              <a:rPr lang="en-US" altLang="zh-CN" sz="1400" kern="0" dirty="0">
                 <a:solidFill>
                   <a:srgbClr val="000000"/>
                 </a:solidFill>
@@ -8798,7 +8822,7 @@
               <a:t>,</a:t>
             </a:r>
             <a:r>
-              <a:rPr lang="en-US" altLang="zh-CN" sz="1800" kern="0" dirty="0">
+              <a:rPr lang="en-US" altLang="zh-CN" sz="1400" kern="0" dirty="0">
                 <a:solidFill>
                   <a:srgbClr val="098658"/>
                 </a:solidFill>
@@ -8810,7 +8834,7 @@
               <a:t>5</a:t>
             </a:r>
             <a:r>
-              <a:rPr lang="en-US" altLang="zh-CN" sz="1800" kern="0" dirty="0">
+              <a:rPr lang="en-US" altLang="zh-CN" sz="1400" kern="0" dirty="0">
                 <a:solidFill>
                   <a:srgbClr val="000000"/>
                 </a:solidFill>
@@ -8821,7 +8845,7 @@
               </a:rPr>
               <a:t>};</a:t>
             </a:r>
-            <a:endParaRPr lang="zh-CN" altLang="zh-CN" sz="1800" kern="100" dirty="0">
+            <a:endParaRPr lang="zh-CN" altLang="zh-CN" sz="1400" kern="100" dirty="0">
               <a:effectLst/>
               <a:latin typeface="DengXian" panose="02010600030101010101" pitchFamily="2" charset="-122"/>
               <a:ea typeface="DengXian" panose="02010600030101010101" pitchFamily="2" charset="-122"/>
@@ -8831,7 +8855,7 @@
           <a:p>
             <a:pPr algn="l"/>
             <a:r>
-              <a:rPr lang="en-US" altLang="zh-CN" sz="1800" kern="0" dirty="0">
+              <a:rPr lang="en-US" altLang="zh-CN" sz="1400" kern="0" dirty="0">
                 <a:solidFill>
                   <a:srgbClr val="000000"/>
                 </a:solidFill>
@@ -8843,7 +8867,7 @@
               <a:t>    </a:t>
             </a:r>
             <a:r>
-              <a:rPr lang="en-US" altLang="zh-CN" sz="1800" kern="0" dirty="0">
+              <a:rPr lang="en-US" altLang="zh-CN" sz="1400" kern="0" dirty="0">
                 <a:solidFill>
                   <a:srgbClr val="0000FF"/>
                 </a:solidFill>
@@ -8855,7 +8879,7 @@
               <a:t>int</a:t>
             </a:r>
             <a:r>
-              <a:rPr lang="en-US" altLang="zh-CN" sz="1800" kern="0" dirty="0">
+              <a:rPr lang="en-US" altLang="zh-CN" sz="1400" kern="0" dirty="0">
                 <a:solidFill>
                   <a:srgbClr val="000000"/>
                 </a:solidFill>
@@ -8867,7 +8891,7 @@
               <a:t> *</a:t>
             </a:r>
             <a:r>
-              <a:rPr lang="en-US" altLang="zh-CN" sz="1800" kern="0" dirty="0">
+              <a:rPr lang="en-US" altLang="zh-CN" sz="1400" kern="0" dirty="0">
                 <a:solidFill>
                   <a:srgbClr val="001080"/>
                 </a:solidFill>
@@ -8879,7 +8903,7 @@
               <a:t>p2</a:t>
             </a:r>
             <a:r>
-              <a:rPr lang="en-US" altLang="zh-CN" sz="1800" kern="0" dirty="0">
+              <a:rPr lang="en-US" altLang="zh-CN" sz="1400" kern="0" dirty="0">
                 <a:solidFill>
                   <a:srgbClr val="000000"/>
                 </a:solidFill>
@@ -8891,7 +8915,7 @@
               <a:t> = (</a:t>
             </a:r>
             <a:r>
-              <a:rPr lang="en-US" altLang="zh-CN" sz="1800" kern="0" dirty="0">
+              <a:rPr lang="en-US" altLang="zh-CN" sz="1400" kern="0" dirty="0">
                 <a:solidFill>
                   <a:srgbClr val="0000FF"/>
                 </a:solidFill>
@@ -8903,7 +8927,7 @@
               <a:t>int</a:t>
             </a:r>
             <a:r>
-              <a:rPr lang="en-US" altLang="zh-CN" sz="1800" kern="0" dirty="0">
+              <a:rPr lang="en-US" altLang="zh-CN" sz="1400" kern="0" dirty="0">
                 <a:solidFill>
                   <a:srgbClr val="000000"/>
                 </a:solidFill>
@@ -8915,7 +8939,7 @@
               <a:t>*)(&amp;</a:t>
             </a:r>
             <a:r>
-              <a:rPr lang="en-US" altLang="zh-CN" sz="1800" kern="0" dirty="0">
+              <a:rPr lang="en-US" altLang="zh-CN" sz="1400" kern="0" dirty="0">
                 <a:solidFill>
                   <a:srgbClr val="001080"/>
                 </a:solidFill>
@@ -8927,7 +8951,7 @@
               <a:t>numbers2</a:t>
             </a:r>
             <a:r>
-              <a:rPr lang="en-US" altLang="zh-CN" sz="1800" kern="0" dirty="0">
+              <a:rPr lang="en-US" altLang="zh-CN" sz="1400" kern="0" dirty="0">
                 <a:solidFill>
                   <a:srgbClr val="000000"/>
                 </a:solidFill>
@@ -8939,7 +8963,7 @@
               <a:t> + </a:t>
             </a:r>
             <a:r>
-              <a:rPr lang="en-US" altLang="zh-CN" sz="1800" kern="0" dirty="0">
+              <a:rPr lang="en-US" altLang="zh-CN" sz="1400" kern="0" dirty="0">
                 <a:solidFill>
                   <a:srgbClr val="098658"/>
                 </a:solidFill>
@@ -8951,7 +8975,7 @@
               <a:t>1</a:t>
             </a:r>
             <a:r>
-              <a:rPr lang="en-US" altLang="zh-CN" sz="1800" kern="0" dirty="0">
+              <a:rPr lang="en-US" altLang="zh-CN" sz="1400" kern="0" dirty="0">
                 <a:solidFill>
                   <a:srgbClr val="000000"/>
                 </a:solidFill>
@@ -8962,7 +8986,7 @@
               </a:rPr>
               <a:t>);</a:t>
             </a:r>
-            <a:endParaRPr lang="zh-CN" altLang="zh-CN" sz="1800" kern="100" dirty="0">
+            <a:endParaRPr lang="zh-CN" altLang="zh-CN" sz="1400" kern="100" dirty="0">
               <a:effectLst/>
               <a:latin typeface="DengXian" panose="02010600030101010101" pitchFamily="2" charset="-122"/>
               <a:ea typeface="DengXian" panose="02010600030101010101" pitchFamily="2" charset="-122"/>
@@ -8972,7 +8996,7 @@
           <a:p>
             <a:pPr algn="l"/>
             <a:r>
-              <a:rPr lang="en-US" altLang="zh-CN" sz="1800" kern="0" dirty="0">
+              <a:rPr lang="en-US" altLang="zh-CN" sz="1400" kern="0" dirty="0">
                 <a:solidFill>
                   <a:srgbClr val="000000"/>
                 </a:solidFill>
@@ -8984,7 +9008,7 @@
               <a:t>    </a:t>
             </a:r>
             <a:r>
-              <a:rPr lang="en-US" altLang="zh-CN" sz="1800" kern="0" dirty="0" err="1">
+              <a:rPr lang="en-US" altLang="zh-CN" sz="1400" kern="0" dirty="0" err="1">
                 <a:solidFill>
                   <a:srgbClr val="795E26"/>
                 </a:solidFill>
@@ -8996,7 +9020,7 @@
               <a:t>printf</a:t>
             </a:r>
             <a:r>
-              <a:rPr lang="en-US" altLang="zh-CN" sz="1800" kern="0" dirty="0">
+              <a:rPr lang="en-US" altLang="zh-CN" sz="1400" kern="0" dirty="0">
                 <a:solidFill>
                   <a:srgbClr val="000000"/>
                 </a:solidFill>
@@ -9008,7 +9032,7 @@
               <a:t>(</a:t>
             </a:r>
             <a:r>
-              <a:rPr lang="en-US" altLang="zh-CN" sz="1800" kern="0" dirty="0">
+              <a:rPr lang="en-US" altLang="zh-CN" sz="1400" kern="0" dirty="0">
                 <a:solidFill>
                   <a:srgbClr val="A31515"/>
                 </a:solidFill>
@@ -9020,7 +9044,7 @@
               <a:t>"numbers2     = </a:t>
             </a:r>
             <a:r>
-              <a:rPr lang="en-US" altLang="zh-CN" sz="1800" kern="0" dirty="0">
+              <a:rPr lang="en-US" altLang="zh-CN" sz="1400" kern="0" dirty="0">
                 <a:solidFill>
                   <a:srgbClr val="001080"/>
                 </a:solidFill>
@@ -9032,7 +9056,7 @@
               <a:t>%p</a:t>
             </a:r>
             <a:r>
-              <a:rPr lang="en-US" altLang="zh-CN" sz="1800" kern="0" dirty="0">
+              <a:rPr lang="en-US" altLang="zh-CN" sz="1400" kern="0" dirty="0">
                 <a:solidFill>
                   <a:srgbClr val="EE0000"/>
                 </a:solidFill>
@@ -9044,7 +9068,7 @@
               <a:t>\n</a:t>
             </a:r>
             <a:r>
-              <a:rPr lang="en-US" altLang="zh-CN" sz="1800" kern="0" dirty="0">
+              <a:rPr lang="en-US" altLang="zh-CN" sz="1400" kern="0" dirty="0">
                 <a:solidFill>
                   <a:srgbClr val="A31515"/>
                 </a:solidFill>
@@ -9056,7 +9080,7 @@
               <a:t>"</a:t>
             </a:r>
             <a:r>
-              <a:rPr lang="en-US" altLang="zh-CN" sz="1800" kern="0" dirty="0">
+              <a:rPr lang="en-US" altLang="zh-CN" sz="1400" kern="0" dirty="0">
                 <a:solidFill>
                   <a:srgbClr val="000000"/>
                 </a:solidFill>
@@ -9068,7 +9092,7 @@
               <a:t>, </a:t>
             </a:r>
             <a:r>
-              <a:rPr lang="en-US" altLang="zh-CN" sz="1800" kern="0" dirty="0">
+              <a:rPr lang="en-US" altLang="zh-CN" sz="1400" kern="0" dirty="0">
                 <a:solidFill>
                   <a:srgbClr val="001080"/>
                 </a:solidFill>
@@ -9080,7 +9104,7 @@
               <a:t>numbers2</a:t>
             </a:r>
             <a:r>
-              <a:rPr lang="en-US" altLang="zh-CN" sz="1800" kern="0" dirty="0">
+              <a:rPr lang="en-US" altLang="zh-CN" sz="1400" kern="0" dirty="0">
                 <a:solidFill>
                   <a:srgbClr val="000000"/>
                 </a:solidFill>
@@ -9091,7 +9115,7 @@
               </a:rPr>
               <a:t>);</a:t>
             </a:r>
-            <a:endParaRPr lang="zh-CN" altLang="zh-CN" sz="1800" kern="100" dirty="0">
+            <a:endParaRPr lang="zh-CN" altLang="zh-CN" sz="1400" kern="100" dirty="0">
               <a:effectLst/>
               <a:latin typeface="DengXian" panose="02010600030101010101" pitchFamily="2" charset="-122"/>
               <a:ea typeface="DengXian" panose="02010600030101010101" pitchFamily="2" charset="-122"/>
@@ -9101,7 +9125,7 @@
           <a:p>
             <a:pPr algn="l"/>
             <a:r>
-              <a:rPr lang="en-US" altLang="zh-CN" sz="1800" kern="0" dirty="0">
+              <a:rPr lang="en-US" altLang="zh-CN" sz="1400" kern="0" dirty="0">
                 <a:solidFill>
                   <a:srgbClr val="000000"/>
                 </a:solidFill>
@@ -9113,7 +9137,7 @@
               <a:t>    </a:t>
             </a:r>
             <a:r>
-              <a:rPr lang="en-US" altLang="zh-CN" sz="1800" kern="0" dirty="0" err="1">
+              <a:rPr lang="en-US" altLang="zh-CN" sz="1400" kern="0" dirty="0" err="1">
                 <a:solidFill>
                   <a:srgbClr val="795E26"/>
                 </a:solidFill>
@@ -9125,7 +9149,7 @@
               <a:t>printf</a:t>
             </a:r>
             <a:r>
-              <a:rPr lang="en-US" altLang="zh-CN" sz="1800" kern="0" dirty="0">
+              <a:rPr lang="en-US" altLang="zh-CN" sz="1400" kern="0" dirty="0">
                 <a:solidFill>
                   <a:srgbClr val="000000"/>
                 </a:solidFill>
@@ -9137,7 +9161,7 @@
               <a:t>(</a:t>
             </a:r>
             <a:r>
-              <a:rPr lang="en-US" altLang="zh-CN" sz="1800" kern="0" dirty="0">
+              <a:rPr lang="en-US" altLang="zh-CN" sz="1400" kern="0" dirty="0">
                 <a:solidFill>
                   <a:srgbClr val="A31515"/>
                 </a:solidFill>
@@ -9149,7 +9173,7 @@
               <a:t>"numbers2 + 4 = </a:t>
             </a:r>
             <a:r>
-              <a:rPr lang="en-US" altLang="zh-CN" sz="1800" kern="0" dirty="0">
+              <a:rPr lang="en-US" altLang="zh-CN" sz="1400" kern="0" dirty="0">
                 <a:solidFill>
                   <a:srgbClr val="001080"/>
                 </a:solidFill>
@@ -9161,7 +9185,7 @@
               <a:t>%p</a:t>
             </a:r>
             <a:r>
-              <a:rPr lang="en-US" altLang="zh-CN" sz="1800" kern="0" dirty="0">
+              <a:rPr lang="en-US" altLang="zh-CN" sz="1400" kern="0" dirty="0">
                 <a:solidFill>
                   <a:srgbClr val="EE0000"/>
                 </a:solidFill>
@@ -9173,7 +9197,7 @@
               <a:t>\n</a:t>
             </a:r>
             <a:r>
-              <a:rPr lang="en-US" altLang="zh-CN" sz="1800" kern="0" dirty="0">
+              <a:rPr lang="en-US" altLang="zh-CN" sz="1400" kern="0" dirty="0">
                 <a:solidFill>
                   <a:srgbClr val="A31515"/>
                 </a:solidFill>
@@ -9185,7 +9209,7 @@
               <a:t>"</a:t>
             </a:r>
             <a:r>
-              <a:rPr lang="en-US" altLang="zh-CN" sz="1800" kern="0" dirty="0">
+              <a:rPr lang="en-US" altLang="zh-CN" sz="1400" kern="0" dirty="0">
                 <a:solidFill>
                   <a:srgbClr val="000000"/>
                 </a:solidFill>
@@ -9197,7 +9221,7 @@
               <a:t>, </a:t>
             </a:r>
             <a:r>
-              <a:rPr lang="en-US" altLang="zh-CN" sz="1800" kern="0" dirty="0">
+              <a:rPr lang="en-US" altLang="zh-CN" sz="1400" kern="0" dirty="0">
                 <a:solidFill>
                   <a:srgbClr val="001080"/>
                 </a:solidFill>
@@ -9209,7 +9233,7 @@
               <a:t>numbers2</a:t>
             </a:r>
             <a:r>
-              <a:rPr lang="en-US" altLang="zh-CN" sz="1800" kern="0" dirty="0">
+              <a:rPr lang="en-US" altLang="zh-CN" sz="1400" kern="0" dirty="0">
                 <a:solidFill>
                   <a:srgbClr val="000000"/>
                 </a:solidFill>
@@ -9221,7 +9245,7 @@
               <a:t> + </a:t>
             </a:r>
             <a:r>
-              <a:rPr lang="en-US" altLang="zh-CN" sz="1800" kern="0" dirty="0">
+              <a:rPr lang="en-US" altLang="zh-CN" sz="1400" kern="0" dirty="0">
                 <a:solidFill>
                   <a:srgbClr val="098658"/>
                 </a:solidFill>
@@ -9233,7 +9257,7 @@
               <a:t>4</a:t>
             </a:r>
             <a:r>
-              <a:rPr lang="en-US" altLang="zh-CN" sz="1800" kern="0" dirty="0">
+              <a:rPr lang="en-US" altLang="zh-CN" sz="1400" kern="0" dirty="0">
                 <a:solidFill>
                   <a:srgbClr val="000000"/>
                 </a:solidFill>
@@ -9244,7 +9268,7 @@
               </a:rPr>
               <a:t>);</a:t>
             </a:r>
-            <a:endParaRPr lang="zh-CN" altLang="zh-CN" sz="1800" kern="100" dirty="0">
+            <a:endParaRPr lang="zh-CN" altLang="zh-CN" sz="1400" kern="100" dirty="0">
               <a:effectLst/>
               <a:latin typeface="DengXian" panose="02010600030101010101" pitchFamily="2" charset="-122"/>
               <a:ea typeface="DengXian" panose="02010600030101010101" pitchFamily="2" charset="-122"/>
@@ -9254,7 +9278,7 @@
           <a:p>
             <a:pPr algn="l"/>
             <a:r>
-              <a:rPr lang="en-US" altLang="zh-CN" sz="1800" kern="0" dirty="0">
+              <a:rPr lang="en-US" altLang="zh-CN" sz="1400" kern="0" dirty="0">
                 <a:solidFill>
                   <a:srgbClr val="000000"/>
                 </a:solidFill>
@@ -9266,7 +9290,7 @@
               <a:t>    </a:t>
             </a:r>
             <a:r>
-              <a:rPr lang="en-US" altLang="zh-CN" sz="1800" kern="0" dirty="0" err="1">
+              <a:rPr lang="en-US" altLang="zh-CN" sz="1400" kern="0" dirty="0" err="1">
                 <a:solidFill>
                   <a:srgbClr val="795E26"/>
                 </a:solidFill>
@@ -9278,7 +9302,7 @@
               <a:t>printf</a:t>
             </a:r>
             <a:r>
-              <a:rPr lang="en-US" altLang="zh-CN" sz="1800" kern="0" dirty="0">
+              <a:rPr lang="en-US" altLang="zh-CN" sz="1400" kern="0" dirty="0">
                 <a:solidFill>
                   <a:srgbClr val="000000"/>
                 </a:solidFill>
@@ -9290,7 +9314,7 @@
               <a:t>(</a:t>
             </a:r>
             <a:r>
-              <a:rPr lang="en-US" altLang="zh-CN" sz="1800" kern="0" dirty="0">
+              <a:rPr lang="en-US" altLang="zh-CN" sz="1400" kern="0" dirty="0">
                 <a:solidFill>
                   <a:srgbClr val="A31515"/>
                 </a:solidFill>
@@ -9302,7 +9326,7 @@
               <a:t>"p2           = </a:t>
             </a:r>
             <a:r>
-              <a:rPr lang="en-US" altLang="zh-CN" sz="1800" kern="0" dirty="0">
+              <a:rPr lang="en-US" altLang="zh-CN" sz="1400" kern="0" dirty="0">
                 <a:solidFill>
                   <a:srgbClr val="001080"/>
                 </a:solidFill>
@@ -9314,7 +9338,7 @@
               <a:t>%p</a:t>
             </a:r>
             <a:r>
-              <a:rPr lang="en-US" altLang="zh-CN" sz="1800" kern="0" dirty="0">
+              <a:rPr lang="en-US" altLang="zh-CN" sz="1400" kern="0" dirty="0">
                 <a:solidFill>
                   <a:srgbClr val="EE0000"/>
                 </a:solidFill>
@@ -9326,7 +9350,7 @@
               <a:t>\n</a:t>
             </a:r>
             <a:r>
-              <a:rPr lang="en-US" altLang="zh-CN" sz="1800" kern="0" dirty="0">
+              <a:rPr lang="en-US" altLang="zh-CN" sz="1400" kern="0" dirty="0">
                 <a:solidFill>
                   <a:srgbClr val="A31515"/>
                 </a:solidFill>
@@ -9338,7 +9362,7 @@
               <a:t>"</a:t>
             </a:r>
             <a:r>
-              <a:rPr lang="en-US" altLang="zh-CN" sz="1800" kern="0" dirty="0">
+              <a:rPr lang="en-US" altLang="zh-CN" sz="1400" kern="0" dirty="0">
                 <a:solidFill>
                   <a:srgbClr val="000000"/>
                 </a:solidFill>
@@ -9350,7 +9374,7 @@
               <a:t>, </a:t>
             </a:r>
             <a:r>
-              <a:rPr lang="en-US" altLang="zh-CN" sz="1800" kern="0" dirty="0">
+              <a:rPr lang="en-US" altLang="zh-CN" sz="1400" kern="0" dirty="0">
                 <a:solidFill>
                   <a:srgbClr val="001080"/>
                 </a:solidFill>
@@ -9362,7 +9386,7 @@
               <a:t>p2</a:t>
             </a:r>
             <a:r>
-              <a:rPr lang="en-US" altLang="zh-CN" sz="1800" kern="0" dirty="0">
+              <a:rPr lang="en-US" altLang="zh-CN" sz="1400" kern="0" dirty="0">
                 <a:solidFill>
                   <a:srgbClr val="000000"/>
                 </a:solidFill>
@@ -9373,7 +9397,7 @@
               </a:rPr>
               <a:t>);</a:t>
             </a:r>
-            <a:endParaRPr lang="zh-CN" altLang="zh-CN" sz="1800" kern="100" dirty="0">
+            <a:endParaRPr lang="zh-CN" altLang="zh-CN" sz="1400" kern="100" dirty="0">
               <a:effectLst/>
               <a:latin typeface="DengXian" panose="02010600030101010101" pitchFamily="2" charset="-122"/>
               <a:ea typeface="DengXian" panose="02010600030101010101" pitchFamily="2" charset="-122"/>
@@ -9383,7 +9407,7 @@
           <a:p>
             <a:pPr algn="l"/>
             <a:r>
-              <a:rPr lang="en-US" altLang="zh-CN" sz="1800" kern="0" dirty="0">
+              <a:rPr lang="en-US" altLang="zh-CN" sz="1400" kern="0" dirty="0">
                 <a:solidFill>
                   <a:srgbClr val="000000"/>
                 </a:solidFill>
@@ -9395,7 +9419,7 @@
               <a:t>    </a:t>
             </a:r>
             <a:r>
-              <a:rPr lang="en-US" altLang="zh-CN" sz="1800" kern="0" dirty="0" err="1">
+              <a:rPr lang="en-US" altLang="zh-CN" sz="1400" kern="0" dirty="0" err="1">
                 <a:solidFill>
                   <a:srgbClr val="795E26"/>
                 </a:solidFill>
@@ -9407,7 +9431,7 @@
               <a:t>printf</a:t>
             </a:r>
             <a:r>
-              <a:rPr lang="en-US" altLang="zh-CN" sz="1800" kern="0" dirty="0">
+              <a:rPr lang="en-US" altLang="zh-CN" sz="1400" kern="0" dirty="0">
                 <a:solidFill>
                   <a:srgbClr val="000000"/>
                 </a:solidFill>
@@ -9419,7 +9443,7 @@
               <a:t>(</a:t>
             </a:r>
             <a:r>
-              <a:rPr lang="en-US" altLang="zh-CN" sz="1800" kern="0" dirty="0">
+              <a:rPr lang="en-US" altLang="zh-CN" sz="1400" kern="0" dirty="0">
                 <a:solidFill>
                   <a:srgbClr val="A31515"/>
                 </a:solidFill>
@@ -9431,7 +9455,7 @@
               <a:t>"*(numbers2+1)= </a:t>
             </a:r>
             <a:r>
-              <a:rPr lang="en-US" altLang="zh-CN" sz="1800" kern="0" dirty="0">
+              <a:rPr lang="en-US" altLang="zh-CN" sz="1400" kern="0" dirty="0">
                 <a:solidFill>
                   <a:srgbClr val="001080"/>
                 </a:solidFill>
@@ -9443,7 +9467,7 @@
               <a:t>%d</a:t>
             </a:r>
             <a:r>
-              <a:rPr lang="en-US" altLang="zh-CN" sz="1800" kern="0" dirty="0">
+              <a:rPr lang="en-US" altLang="zh-CN" sz="1400" kern="0" dirty="0">
                 <a:solidFill>
                   <a:srgbClr val="EE0000"/>
                 </a:solidFill>
@@ -9455,7 +9479,7 @@
               <a:t>\n</a:t>
             </a:r>
             <a:r>
-              <a:rPr lang="en-US" altLang="zh-CN" sz="1800" kern="0" dirty="0">
+              <a:rPr lang="en-US" altLang="zh-CN" sz="1400" kern="0" dirty="0">
                 <a:solidFill>
                   <a:srgbClr val="A31515"/>
                 </a:solidFill>
@@ -9467,7 +9491,7 @@
               <a:t>"</a:t>
             </a:r>
             <a:r>
-              <a:rPr lang="en-US" altLang="zh-CN" sz="1800" kern="0" dirty="0">
+              <a:rPr lang="en-US" altLang="zh-CN" sz="1400" kern="0" dirty="0">
                 <a:solidFill>
                   <a:srgbClr val="000000"/>
                 </a:solidFill>
@@ -9479,7 +9503,7 @@
               <a:t>,*(</a:t>
             </a:r>
             <a:r>
-              <a:rPr lang="en-US" altLang="zh-CN" sz="1800" kern="0" dirty="0">
+              <a:rPr lang="en-US" altLang="zh-CN" sz="1400" kern="0" dirty="0">
                 <a:solidFill>
                   <a:srgbClr val="001080"/>
                 </a:solidFill>
@@ -9491,7 +9515,7 @@
               <a:t>numbers2</a:t>
             </a:r>
             <a:r>
-              <a:rPr lang="en-US" altLang="zh-CN" sz="1800" kern="0" dirty="0">
+              <a:rPr lang="en-US" altLang="zh-CN" sz="1400" kern="0" dirty="0">
                 <a:solidFill>
                   <a:srgbClr val="000000"/>
                 </a:solidFill>
@@ -9503,7 +9527,7 @@
               <a:t>+</a:t>
             </a:r>
             <a:r>
-              <a:rPr lang="en-US" altLang="zh-CN" sz="1800" kern="0" dirty="0">
+              <a:rPr lang="en-US" altLang="zh-CN" sz="1400" kern="0" dirty="0">
                 <a:solidFill>
                   <a:srgbClr val="098658"/>
                 </a:solidFill>
@@ -9515,7 +9539,7 @@
               <a:t>1</a:t>
             </a:r>
             <a:r>
-              <a:rPr lang="en-US" altLang="zh-CN" sz="1800" kern="0" dirty="0">
+              <a:rPr lang="en-US" altLang="zh-CN" sz="1400" kern="0" dirty="0">
                 <a:solidFill>
                   <a:srgbClr val="000000"/>
                 </a:solidFill>
@@ -9526,7 +9550,7 @@
               </a:rPr>
               <a:t>));</a:t>
             </a:r>
-            <a:endParaRPr lang="zh-CN" altLang="zh-CN" sz="1800" kern="100" dirty="0">
+            <a:endParaRPr lang="zh-CN" altLang="zh-CN" sz="1400" kern="100" dirty="0">
               <a:effectLst/>
               <a:latin typeface="DengXian" panose="02010600030101010101" pitchFamily="2" charset="-122"/>
               <a:ea typeface="DengXian" panose="02010600030101010101" pitchFamily="2" charset="-122"/>
@@ -9536,7 +9560,7 @@
           <a:p>
             <a:pPr algn="l"/>
             <a:r>
-              <a:rPr lang="en-US" altLang="zh-CN" sz="1800" kern="0" dirty="0">
+              <a:rPr lang="en-US" altLang="zh-CN" sz="1400" kern="0" dirty="0">
                 <a:solidFill>
                   <a:srgbClr val="000000"/>
                 </a:solidFill>
@@ -9548,7 +9572,7 @@
               <a:t>    </a:t>
             </a:r>
             <a:r>
-              <a:rPr lang="en-US" altLang="zh-CN" sz="1800" kern="0" dirty="0" err="1">
+              <a:rPr lang="en-US" altLang="zh-CN" sz="1400" kern="0" dirty="0" err="1">
                 <a:solidFill>
                   <a:srgbClr val="795E26"/>
                 </a:solidFill>
@@ -9560,7 +9584,7 @@
               <a:t>printf</a:t>
             </a:r>
             <a:r>
-              <a:rPr lang="en-US" altLang="zh-CN" sz="1800" kern="0" dirty="0">
+              <a:rPr lang="en-US" altLang="zh-CN" sz="1400" kern="0" dirty="0">
                 <a:solidFill>
                   <a:srgbClr val="000000"/>
                 </a:solidFill>
@@ -9572,7 +9596,7 @@
               <a:t>(</a:t>
             </a:r>
             <a:r>
-              <a:rPr lang="en-US" altLang="zh-CN" sz="1800" kern="0" dirty="0">
+              <a:rPr lang="en-US" altLang="zh-CN" sz="1400" kern="0" dirty="0">
                 <a:solidFill>
                   <a:srgbClr val="A31515"/>
                 </a:solidFill>
@@ -9584,7 +9608,7 @@
               <a:t>"(p2-1)       = </a:t>
             </a:r>
             <a:r>
-              <a:rPr lang="en-US" altLang="zh-CN" sz="1800" kern="0" dirty="0">
+              <a:rPr lang="en-US" altLang="zh-CN" sz="1400" kern="0" dirty="0">
                 <a:solidFill>
                   <a:srgbClr val="001080"/>
                 </a:solidFill>
@@ -9596,7 +9620,7 @@
               <a:t>%d</a:t>
             </a:r>
             <a:r>
-              <a:rPr lang="en-US" altLang="zh-CN" sz="1800" kern="0" dirty="0">
+              <a:rPr lang="en-US" altLang="zh-CN" sz="1400" kern="0" dirty="0">
                 <a:solidFill>
                   <a:srgbClr val="EE0000"/>
                 </a:solidFill>
@@ -9608,7 +9632,7 @@
               <a:t>\n</a:t>
             </a:r>
             <a:r>
-              <a:rPr lang="en-US" altLang="zh-CN" sz="1800" kern="0" dirty="0">
+              <a:rPr lang="en-US" altLang="zh-CN" sz="1400" kern="0" dirty="0">
                 <a:solidFill>
                   <a:srgbClr val="A31515"/>
                 </a:solidFill>
@@ -9620,7 +9644,7 @@
               <a:t>"</a:t>
             </a:r>
             <a:r>
-              <a:rPr lang="en-US" altLang="zh-CN" sz="1800" kern="0" dirty="0">
+              <a:rPr lang="en-US" altLang="zh-CN" sz="1400" kern="0" dirty="0">
                 <a:solidFill>
                   <a:srgbClr val="000000"/>
                 </a:solidFill>
@@ -9632,7 +9656,7 @@
               <a:t>,*(</a:t>
             </a:r>
             <a:r>
-              <a:rPr lang="en-US" altLang="zh-CN" sz="1800" kern="0" dirty="0">
+              <a:rPr lang="en-US" altLang="zh-CN" sz="1400" kern="0" dirty="0">
                 <a:solidFill>
                   <a:srgbClr val="001080"/>
                 </a:solidFill>
@@ -9644,7 +9668,7 @@
               <a:t>p2</a:t>
             </a:r>
             <a:r>
-              <a:rPr lang="en-US" altLang="zh-CN" sz="1800" kern="0" dirty="0">
+              <a:rPr lang="en-US" altLang="zh-CN" sz="1400" kern="0" dirty="0">
                 <a:solidFill>
                   <a:srgbClr val="000000"/>
                 </a:solidFill>
@@ -9656,7 +9680,7 @@
               <a:t>-</a:t>
             </a:r>
             <a:r>
-              <a:rPr lang="en-US" altLang="zh-CN" sz="1800" kern="0" dirty="0">
+              <a:rPr lang="en-US" altLang="zh-CN" sz="1400" kern="0" dirty="0">
                 <a:solidFill>
                   <a:srgbClr val="098658"/>
                 </a:solidFill>
@@ -9668,7 +9692,7 @@
               <a:t>1</a:t>
             </a:r>
             <a:r>
-              <a:rPr lang="en-US" altLang="zh-CN" sz="1800" kern="0" dirty="0">
+              <a:rPr lang="en-US" altLang="zh-CN" sz="1400" kern="0" dirty="0">
                 <a:solidFill>
                   <a:srgbClr val="000000"/>
                 </a:solidFill>
@@ -9679,7 +9703,7 @@
               </a:rPr>
               <a:t>));</a:t>
             </a:r>
-            <a:endParaRPr lang="zh-CN" altLang="zh-CN" sz="1800" kern="100" dirty="0">
+            <a:endParaRPr lang="zh-CN" altLang="zh-CN" sz="1400" kern="100" dirty="0">
               <a:effectLst/>
               <a:latin typeface="DengXian" panose="02010600030101010101" pitchFamily="2" charset="-122"/>
               <a:ea typeface="DengXian" panose="02010600030101010101" pitchFamily="2" charset="-122"/>
@@ -9689,7 +9713,7 @@
           <a:p>
             <a:pPr algn="l"/>
             <a:r>
-              <a:rPr lang="en-US" altLang="zh-CN" sz="1800" kern="0" dirty="0">
+              <a:rPr lang="en-US" altLang="zh-CN" sz="1400" kern="0" dirty="0">
                 <a:solidFill>
                   <a:srgbClr val="000000"/>
                 </a:solidFill>
@@ -9701,7 +9725,7 @@
               <a:t>    </a:t>
             </a:r>
             <a:r>
-              <a:rPr lang="en-US" altLang="zh-CN" sz="1800" kern="0" dirty="0">
+              <a:rPr lang="en-US" altLang="zh-CN" sz="1400" kern="0" dirty="0">
                 <a:solidFill>
                   <a:srgbClr val="AF00DB"/>
                 </a:solidFill>
@@ -9713,7 +9737,7 @@
               <a:t>return</a:t>
             </a:r>
             <a:r>
-              <a:rPr lang="en-US" altLang="zh-CN" sz="1800" kern="0" dirty="0">
+              <a:rPr lang="en-US" altLang="zh-CN" sz="1400" kern="0" dirty="0">
                 <a:solidFill>
                   <a:srgbClr val="000000"/>
                 </a:solidFill>
@@ -9725,7 +9749,7 @@
               <a:t> </a:t>
             </a:r>
             <a:r>
-              <a:rPr lang="en-US" altLang="zh-CN" sz="1800" kern="0" dirty="0">
+              <a:rPr lang="en-US" altLang="zh-CN" sz="1400" kern="0" dirty="0">
                 <a:solidFill>
                   <a:srgbClr val="098658"/>
                 </a:solidFill>
@@ -9737,7 +9761,7 @@
               <a:t>0</a:t>
             </a:r>
             <a:r>
-              <a:rPr lang="en-US" altLang="zh-CN" sz="1800" kern="0" dirty="0">
+              <a:rPr lang="en-US" altLang="zh-CN" sz="1400" kern="0" dirty="0">
                 <a:solidFill>
                   <a:srgbClr val="000000"/>
                 </a:solidFill>
@@ -9748,7 +9772,7 @@
               </a:rPr>
               <a:t>;</a:t>
             </a:r>
-            <a:endParaRPr lang="zh-CN" altLang="zh-CN" sz="1800" kern="100" dirty="0">
+            <a:endParaRPr lang="zh-CN" altLang="zh-CN" sz="1400" kern="100" dirty="0">
               <a:effectLst/>
               <a:latin typeface="DengXian" panose="02010600030101010101" pitchFamily="2" charset="-122"/>
               <a:ea typeface="DengXian" panose="02010600030101010101" pitchFamily="2" charset="-122"/>
@@ -9758,7 +9782,7 @@
           <a:p>
             <a:pPr algn="l"/>
             <a:r>
-              <a:rPr lang="en-US" altLang="zh-CN" sz="1800" kern="0" dirty="0">
+              <a:rPr lang="en-US" altLang="zh-CN" sz="1400" kern="0" dirty="0">
                 <a:solidFill>
                   <a:srgbClr val="000000"/>
                 </a:solidFill>
@@ -9769,7 +9793,7 @@
               </a:rPr>
               <a:t>}</a:t>
             </a:r>
-            <a:endParaRPr lang="zh-CN" altLang="zh-CN" sz="1800" kern="100" dirty="0">
+            <a:endParaRPr lang="zh-CN" altLang="zh-CN" sz="1400" kern="100" dirty="0">
               <a:effectLst/>
               <a:latin typeface="DengXian" panose="02010600030101010101" pitchFamily="2" charset="-122"/>
               <a:ea typeface="DengXian" panose="02010600030101010101" pitchFamily="2" charset="-122"/>
@@ -9886,8 +9910,8 @@
         </p:nvSpPr>
         <p:spPr>
           <a:xfrm>
-            <a:off x="1194099" y="1225689"/>
-            <a:ext cx="8285824" cy="5632311"/>
+            <a:off x="1046813" y="1514124"/>
+            <a:ext cx="8285824" cy="4401205"/>
           </a:xfrm>
           <a:prstGeom prst="rect">
             <a:avLst/>
@@ -9912,7 +9936,7 @@
           <a:p>
             <a:pPr algn="l"/>
             <a:r>
-              <a:rPr lang="en-US" altLang="zh-CN" kern="0" dirty="0">
+              <a:rPr lang="en-US" altLang="zh-CN" sz="1400" kern="0" dirty="0">
                 <a:solidFill>
                   <a:srgbClr val="AF00DB"/>
                 </a:solidFill>
@@ -9924,7 +9948,7 @@
               <a:t>#include</a:t>
             </a:r>
             <a:r>
-              <a:rPr lang="en-US" altLang="zh-CN" kern="0" dirty="0">
+              <a:rPr lang="en-US" altLang="zh-CN" sz="1400" kern="0" dirty="0">
                 <a:solidFill>
                   <a:srgbClr val="0000FF"/>
                 </a:solidFill>
@@ -9936,7 +9960,7 @@
               <a:t> </a:t>
             </a:r>
             <a:r>
-              <a:rPr lang="en-US" altLang="zh-CN" kern="0" dirty="0">
+              <a:rPr lang="en-US" altLang="zh-CN" sz="1400" kern="0" dirty="0">
                 <a:solidFill>
                   <a:srgbClr val="A31515"/>
                 </a:solidFill>
@@ -9947,7 +9971,7 @@
               </a:rPr>
               <a:t>&lt;iostream&gt;</a:t>
             </a:r>
-            <a:endParaRPr lang="zh-CN" altLang="zh-CN" kern="100" dirty="0">
+            <a:endParaRPr lang="zh-CN" altLang="zh-CN" sz="1400" kern="100" dirty="0">
               <a:effectLst/>
               <a:latin typeface="DengXian" panose="02010600030101010101" pitchFamily="2" charset="-122"/>
               <a:ea typeface="DengXian" panose="02010600030101010101" pitchFamily="2" charset="-122"/>
@@ -9957,7 +9981,7 @@
           <a:p>
             <a:pPr algn="l"/>
             <a:r>
-              <a:rPr lang="en-US" altLang="zh-CN" kern="0" dirty="0">
+              <a:rPr lang="en-US" altLang="zh-CN" sz="1400" kern="0" dirty="0">
                 <a:solidFill>
                   <a:srgbClr val="AF00DB"/>
                 </a:solidFill>
@@ -9969,7 +9993,7 @@
               <a:t>using</a:t>
             </a:r>
             <a:r>
-              <a:rPr lang="en-US" altLang="zh-CN" kern="0" dirty="0">
+              <a:rPr lang="en-US" altLang="zh-CN" sz="1400" kern="0" dirty="0">
                 <a:solidFill>
                   <a:srgbClr val="000000"/>
                 </a:solidFill>
@@ -9981,7 +10005,7 @@
               <a:t> </a:t>
             </a:r>
             <a:r>
-              <a:rPr lang="en-US" altLang="zh-CN" kern="0" dirty="0">
+              <a:rPr lang="en-US" altLang="zh-CN" sz="1400" kern="0" dirty="0">
                 <a:solidFill>
                   <a:srgbClr val="0000FF"/>
                 </a:solidFill>
@@ -9993,7 +10017,7 @@
               <a:t>namespace</a:t>
             </a:r>
             <a:r>
-              <a:rPr lang="en-US" altLang="zh-CN" kern="0" dirty="0">
+              <a:rPr lang="en-US" altLang="zh-CN" sz="1400" kern="0" dirty="0">
                 <a:solidFill>
                   <a:srgbClr val="000000"/>
                 </a:solidFill>
@@ -10005,7 +10029,7 @@
               <a:t> </a:t>
             </a:r>
             <a:r>
-              <a:rPr lang="en-US" altLang="zh-CN" kern="0" dirty="0">
+              <a:rPr lang="en-US" altLang="zh-CN" sz="1400" kern="0" dirty="0">
                 <a:solidFill>
                   <a:srgbClr val="267F99"/>
                 </a:solidFill>
@@ -10017,7 +10041,7 @@
               <a:t>std</a:t>
             </a:r>
             <a:r>
-              <a:rPr lang="en-US" altLang="zh-CN" kern="0" dirty="0">
+              <a:rPr lang="en-US" altLang="zh-CN" sz="1400" kern="0" dirty="0">
                 <a:solidFill>
                   <a:srgbClr val="000000"/>
                 </a:solidFill>
@@ -10028,7 +10052,7 @@
               </a:rPr>
               <a:t>;</a:t>
             </a:r>
-            <a:endParaRPr lang="zh-CN" altLang="zh-CN" kern="100" dirty="0">
+            <a:endParaRPr lang="zh-CN" altLang="zh-CN" sz="1400" kern="100" dirty="0">
               <a:effectLst/>
               <a:latin typeface="DengXian" panose="02010600030101010101" pitchFamily="2" charset="-122"/>
               <a:ea typeface="DengXian" panose="02010600030101010101" pitchFamily="2" charset="-122"/>
@@ -10038,7 +10062,7 @@
           <a:p>
             <a:pPr algn="l"/>
             <a:r>
-              <a:rPr lang="en-US" altLang="zh-CN" kern="0" dirty="0">
+              <a:rPr lang="en-US" altLang="zh-CN" sz="1400" kern="0" dirty="0">
                 <a:solidFill>
                   <a:srgbClr val="0000FF"/>
                 </a:solidFill>
@@ -10050,7 +10074,7 @@
               <a:t>int</a:t>
             </a:r>
             <a:r>
-              <a:rPr lang="en-US" altLang="zh-CN" kern="0" dirty="0">
+              <a:rPr lang="en-US" altLang="zh-CN" sz="1400" kern="0" dirty="0">
                 <a:solidFill>
                   <a:srgbClr val="000000"/>
                 </a:solidFill>
@@ -10062,7 +10086,7 @@
               <a:t> </a:t>
             </a:r>
             <a:r>
-              <a:rPr lang="en-US" altLang="zh-CN" kern="0" dirty="0">
+              <a:rPr lang="en-US" altLang="zh-CN" sz="1400" kern="0" dirty="0">
                 <a:solidFill>
                   <a:srgbClr val="795E26"/>
                 </a:solidFill>
@@ -10074,7 +10098,7 @@
               <a:t>main</a:t>
             </a:r>
             <a:r>
-              <a:rPr lang="en-US" altLang="zh-CN" kern="0" dirty="0">
+              <a:rPr lang="en-US" altLang="zh-CN" sz="1400" kern="0" dirty="0">
                 <a:solidFill>
                   <a:srgbClr val="000000"/>
                 </a:solidFill>
@@ -10085,7 +10109,7 @@
               </a:rPr>
               <a:t>()</a:t>
             </a:r>
-            <a:endParaRPr lang="zh-CN" altLang="zh-CN" kern="100" dirty="0">
+            <a:endParaRPr lang="zh-CN" altLang="zh-CN" sz="1400" kern="100" dirty="0">
               <a:effectLst/>
               <a:latin typeface="DengXian" panose="02010600030101010101" pitchFamily="2" charset="-122"/>
               <a:ea typeface="DengXian" panose="02010600030101010101" pitchFamily="2" charset="-122"/>
@@ -10095,7 +10119,7 @@
           <a:p>
             <a:pPr algn="l"/>
             <a:r>
-              <a:rPr lang="en-US" altLang="zh-CN" kern="0" dirty="0">
+              <a:rPr lang="en-US" altLang="zh-CN" sz="1400" kern="0" dirty="0">
                 <a:solidFill>
                   <a:srgbClr val="000000"/>
                 </a:solidFill>
@@ -10106,7 +10130,7 @@
               </a:rPr>
               <a:t>{</a:t>
             </a:r>
-            <a:endParaRPr lang="zh-CN" altLang="zh-CN" kern="100" dirty="0">
+            <a:endParaRPr lang="zh-CN" altLang="zh-CN" sz="1400" kern="100" dirty="0">
               <a:effectLst/>
               <a:latin typeface="DengXian" panose="02010600030101010101" pitchFamily="2" charset="-122"/>
               <a:ea typeface="DengXian" panose="02010600030101010101" pitchFamily="2" charset="-122"/>
@@ -10116,7 +10140,7 @@
           <a:p>
             <a:pPr algn="l"/>
             <a:r>
-              <a:rPr lang="en-US" altLang="zh-CN" kern="0" dirty="0">
+              <a:rPr lang="en-US" altLang="zh-CN" sz="1400" kern="0" dirty="0">
                 <a:solidFill>
                   <a:srgbClr val="000000"/>
                 </a:solidFill>
@@ -10128,7 +10152,7 @@
               <a:t>    </a:t>
             </a:r>
             <a:r>
-              <a:rPr lang="en-US" altLang="zh-CN" kern="0" dirty="0">
+              <a:rPr lang="en-US" altLang="zh-CN" sz="1400" kern="0" dirty="0">
                 <a:solidFill>
                   <a:srgbClr val="0000FF"/>
                 </a:solidFill>
@@ -10140,7 +10164,7 @@
               <a:t>int</a:t>
             </a:r>
             <a:r>
-              <a:rPr lang="en-US" altLang="zh-CN" kern="0" dirty="0">
+              <a:rPr lang="en-US" altLang="zh-CN" sz="1400" kern="0" dirty="0">
                 <a:solidFill>
                   <a:srgbClr val="000000"/>
                 </a:solidFill>
@@ -10152,7 +10176,7 @@
               <a:t> </a:t>
             </a:r>
             <a:r>
-              <a:rPr lang="en-US" altLang="zh-CN" kern="0" dirty="0">
+              <a:rPr lang="en-US" altLang="zh-CN" sz="1400" kern="0" dirty="0">
                 <a:solidFill>
                   <a:srgbClr val="001080"/>
                 </a:solidFill>
@@ -10164,7 +10188,7 @@
               <a:t>matrix</a:t>
             </a:r>
             <a:r>
-              <a:rPr lang="en-US" altLang="zh-CN" kern="0" dirty="0">
+              <a:rPr lang="en-US" altLang="zh-CN" sz="1400" kern="0" dirty="0">
                 <a:solidFill>
                   <a:srgbClr val="000000"/>
                 </a:solidFill>
@@ -10176,7 +10200,7 @@
               <a:t>[][</a:t>
             </a:r>
             <a:r>
-              <a:rPr lang="en-US" altLang="zh-CN" kern="0" dirty="0">
+              <a:rPr lang="en-US" altLang="zh-CN" sz="1400" kern="0" dirty="0">
                 <a:solidFill>
                   <a:srgbClr val="098658"/>
                 </a:solidFill>
@@ -10188,7 +10212,7 @@
               <a:t>4</a:t>
             </a:r>
             <a:r>
-              <a:rPr lang="en-US" altLang="zh-CN" kern="0" dirty="0">
+              <a:rPr lang="en-US" altLang="zh-CN" sz="1400" kern="0" dirty="0">
                 <a:solidFill>
                   <a:srgbClr val="000000"/>
                 </a:solidFill>
@@ -10200,7 +10224,7 @@
               <a:t>] = {</a:t>
             </a:r>
             <a:r>
-              <a:rPr lang="en-US" altLang="zh-CN" kern="0" dirty="0">
+              <a:rPr lang="en-US" altLang="zh-CN" sz="1400" kern="0" dirty="0">
                 <a:solidFill>
                   <a:srgbClr val="098658"/>
                 </a:solidFill>
@@ -10212,7 +10236,7 @@
               <a:t>1</a:t>
             </a:r>
             <a:r>
-              <a:rPr lang="en-US" altLang="zh-CN" kern="0" dirty="0">
+              <a:rPr lang="en-US" altLang="zh-CN" sz="1400" kern="0" dirty="0">
                 <a:solidFill>
                   <a:srgbClr val="000000"/>
                 </a:solidFill>
@@ -10224,7 +10248,7 @@
               <a:t>,</a:t>
             </a:r>
             <a:r>
-              <a:rPr lang="en-US" altLang="zh-CN" kern="0" dirty="0">
+              <a:rPr lang="en-US" altLang="zh-CN" sz="1400" kern="0" dirty="0">
                 <a:solidFill>
                   <a:srgbClr val="098658"/>
                 </a:solidFill>
@@ -10236,7 +10260,7 @@
               <a:t>3</a:t>
             </a:r>
             <a:r>
-              <a:rPr lang="en-US" altLang="zh-CN" kern="0" dirty="0">
+              <a:rPr lang="en-US" altLang="zh-CN" sz="1400" kern="0" dirty="0">
                 <a:solidFill>
                   <a:srgbClr val="000000"/>
                 </a:solidFill>
@@ -10248,7 +10272,7 @@
               <a:t>,</a:t>
             </a:r>
             <a:r>
-              <a:rPr lang="en-US" altLang="zh-CN" kern="0" dirty="0">
+              <a:rPr lang="en-US" altLang="zh-CN" sz="1400" kern="0" dirty="0">
                 <a:solidFill>
                   <a:srgbClr val="098658"/>
                 </a:solidFill>
@@ -10260,7 +10284,7 @@
               <a:t>5</a:t>
             </a:r>
             <a:r>
-              <a:rPr lang="en-US" altLang="zh-CN" kern="0" dirty="0">
+              <a:rPr lang="en-US" altLang="zh-CN" sz="1400" kern="0" dirty="0">
                 <a:solidFill>
                   <a:srgbClr val="000000"/>
                 </a:solidFill>
@@ -10272,7 +10296,7 @@
               <a:t>,</a:t>
             </a:r>
             <a:r>
-              <a:rPr lang="en-US" altLang="zh-CN" kern="0" dirty="0">
+              <a:rPr lang="en-US" altLang="zh-CN" sz="1400" kern="0" dirty="0">
                 <a:solidFill>
                   <a:srgbClr val="098658"/>
                 </a:solidFill>
@@ -10284,7 +10308,7 @@
               <a:t>7</a:t>
             </a:r>
             <a:r>
-              <a:rPr lang="en-US" altLang="zh-CN" kern="0" dirty="0">
+              <a:rPr lang="en-US" altLang="zh-CN" sz="1400" kern="0" dirty="0">
                 <a:solidFill>
                   <a:srgbClr val="000000"/>
                 </a:solidFill>
@@ -10296,7 +10320,7 @@
               <a:t>,</a:t>
             </a:r>
             <a:r>
-              <a:rPr lang="en-US" altLang="zh-CN" kern="0" dirty="0">
+              <a:rPr lang="en-US" altLang="zh-CN" sz="1400" kern="0" dirty="0">
                 <a:solidFill>
                   <a:srgbClr val="098658"/>
                 </a:solidFill>
@@ -10308,7 +10332,7 @@
               <a:t>9</a:t>
             </a:r>
             <a:r>
-              <a:rPr lang="en-US" altLang="zh-CN" kern="0" dirty="0">
+              <a:rPr lang="en-US" altLang="zh-CN" sz="1400" kern="0" dirty="0">
                 <a:solidFill>
                   <a:srgbClr val="000000"/>
                 </a:solidFill>
@@ -10320,7 +10344,7 @@
               <a:t>,</a:t>
             </a:r>
             <a:r>
-              <a:rPr lang="en-US" altLang="zh-CN" kern="0" dirty="0">
+              <a:rPr lang="en-US" altLang="zh-CN" sz="1400" kern="0" dirty="0">
                 <a:solidFill>
                   <a:srgbClr val="098658"/>
                 </a:solidFill>
@@ -10332,7 +10356,7 @@
               <a:t>11</a:t>
             </a:r>
             <a:r>
-              <a:rPr lang="en-US" altLang="zh-CN" kern="0" dirty="0">
+              <a:rPr lang="en-US" altLang="zh-CN" sz="1400" kern="0" dirty="0">
                 <a:solidFill>
                   <a:srgbClr val="000000"/>
                 </a:solidFill>
@@ -10344,7 +10368,7 @@
               <a:t>,</a:t>
             </a:r>
             <a:r>
-              <a:rPr lang="en-US" altLang="zh-CN" kern="0" dirty="0">
+              <a:rPr lang="en-US" altLang="zh-CN" sz="1400" kern="0" dirty="0">
                 <a:solidFill>
                   <a:srgbClr val="098658"/>
                 </a:solidFill>
@@ -10356,7 +10380,7 @@
               <a:t>13</a:t>
             </a:r>
             <a:r>
-              <a:rPr lang="en-US" altLang="zh-CN" kern="0" dirty="0">
+              <a:rPr lang="en-US" altLang="zh-CN" sz="1400" kern="0" dirty="0">
                 <a:solidFill>
                   <a:srgbClr val="000000"/>
                 </a:solidFill>
@@ -10368,7 +10392,7 @@
               <a:t>,</a:t>
             </a:r>
             <a:r>
-              <a:rPr lang="en-US" altLang="zh-CN" kern="0" dirty="0">
+              <a:rPr lang="en-US" altLang="zh-CN" sz="1400" kern="0" dirty="0">
                 <a:solidFill>
                   <a:srgbClr val="098658"/>
                 </a:solidFill>
@@ -10380,7 +10404,7 @@
               <a:t>15</a:t>
             </a:r>
             <a:r>
-              <a:rPr lang="en-US" altLang="zh-CN" kern="0" dirty="0">
+              <a:rPr lang="en-US" altLang="zh-CN" sz="1400" kern="0" dirty="0">
                 <a:solidFill>
                   <a:srgbClr val="000000"/>
                 </a:solidFill>
@@ -10392,7 +10416,7 @@
               <a:t>,</a:t>
             </a:r>
             <a:r>
-              <a:rPr lang="en-US" altLang="zh-CN" kern="0" dirty="0">
+              <a:rPr lang="en-US" altLang="zh-CN" sz="1400" kern="0" dirty="0">
                 <a:solidFill>
                   <a:srgbClr val="098658"/>
                 </a:solidFill>
@@ -10404,7 +10428,7 @@
               <a:t>17</a:t>
             </a:r>
             <a:r>
-              <a:rPr lang="en-US" altLang="zh-CN" kern="0" dirty="0">
+              <a:rPr lang="en-US" altLang="zh-CN" sz="1400" kern="0" dirty="0">
                 <a:solidFill>
                   <a:srgbClr val="000000"/>
                 </a:solidFill>
@@ -10416,7 +10440,7 @@
               <a:t>,</a:t>
             </a:r>
             <a:r>
-              <a:rPr lang="en-US" altLang="zh-CN" kern="0" dirty="0">
+              <a:rPr lang="en-US" altLang="zh-CN" sz="1400" kern="0" dirty="0">
                 <a:solidFill>
                   <a:srgbClr val="098658"/>
                 </a:solidFill>
@@ -10428,7 +10452,7 @@
               <a:t>19</a:t>
             </a:r>
             <a:r>
-              <a:rPr lang="en-US" altLang="zh-CN" kern="0" dirty="0">
+              <a:rPr lang="en-US" altLang="zh-CN" sz="1400" kern="0" dirty="0">
                 <a:solidFill>
                   <a:srgbClr val="000000"/>
                 </a:solidFill>
@@ -10439,7 +10463,7 @@
               </a:rPr>
               <a:t>}; </a:t>
             </a:r>
-            <a:endParaRPr lang="zh-CN" altLang="zh-CN" kern="100" dirty="0">
+            <a:endParaRPr lang="zh-CN" altLang="zh-CN" sz="1400" kern="100" dirty="0">
               <a:effectLst/>
               <a:latin typeface="DengXian" panose="02010600030101010101" pitchFamily="2" charset="-122"/>
               <a:ea typeface="DengXian" panose="02010600030101010101" pitchFamily="2" charset="-122"/>
@@ -10449,7 +10473,7 @@
           <a:p>
             <a:pPr algn="l"/>
             <a:r>
-              <a:rPr lang="en-US" altLang="zh-CN" kern="0" dirty="0">
+              <a:rPr lang="en-US" altLang="zh-CN" sz="1400" kern="0" dirty="0">
                 <a:solidFill>
                   <a:srgbClr val="000000"/>
                 </a:solidFill>
@@ -10461,7 +10485,7 @@
               <a:t>    </a:t>
             </a:r>
             <a:r>
-              <a:rPr lang="en-US" altLang="zh-CN" kern="0" dirty="0">
+              <a:rPr lang="en-US" altLang="zh-CN" sz="1400" kern="0" dirty="0">
                 <a:solidFill>
                   <a:srgbClr val="0000FF"/>
                 </a:solidFill>
@@ -10473,7 +10497,7 @@
               <a:t>int</a:t>
             </a:r>
             <a:r>
-              <a:rPr lang="en-US" altLang="zh-CN" kern="0" dirty="0">
+              <a:rPr lang="en-US" altLang="zh-CN" sz="1400" kern="0" dirty="0">
                 <a:solidFill>
                   <a:srgbClr val="000000"/>
                 </a:solidFill>
@@ -10485,7 +10509,7 @@
               <a:t> </a:t>
             </a:r>
             <a:r>
-              <a:rPr lang="en-US" altLang="zh-CN" kern="0" dirty="0">
+              <a:rPr lang="en-US" altLang="zh-CN" sz="1400" kern="0" dirty="0">
                 <a:solidFill>
                   <a:srgbClr val="0000FF"/>
                 </a:solidFill>
@@ -10497,7 +10521,7 @@
               <a:t>*</a:t>
             </a:r>
             <a:r>
-              <a:rPr lang="en-US" altLang="zh-CN" kern="0" dirty="0">
+              <a:rPr lang="en-US" altLang="zh-CN" sz="1400" kern="0" dirty="0">
                 <a:solidFill>
                   <a:srgbClr val="001080"/>
                 </a:solidFill>
@@ -10509,7 +10533,7 @@
               <a:t>p</a:t>
             </a:r>
             <a:r>
-              <a:rPr lang="en-US" altLang="zh-CN" kern="0" dirty="0">
+              <a:rPr lang="en-US" altLang="zh-CN" sz="1400" kern="0" dirty="0">
                 <a:solidFill>
                   <a:srgbClr val="000000"/>
                 </a:solidFill>
@@ -10521,7 +10545,7 @@
               <a:t> = *(</a:t>
             </a:r>
             <a:r>
-              <a:rPr lang="en-US" altLang="zh-CN" kern="0" dirty="0">
+              <a:rPr lang="en-US" altLang="zh-CN" sz="1400" kern="0" dirty="0">
                 <a:solidFill>
                   <a:srgbClr val="001080"/>
                 </a:solidFill>
@@ -10533,7 +10557,7 @@
               <a:t>matrix</a:t>
             </a:r>
             <a:r>
-              <a:rPr lang="en-US" altLang="zh-CN" kern="0" dirty="0">
+              <a:rPr lang="en-US" altLang="zh-CN" sz="1400" kern="0" dirty="0">
                 <a:solidFill>
                   <a:srgbClr val="000000"/>
                 </a:solidFill>
@@ -10545,7 +10569,7 @@
               <a:t> + </a:t>
             </a:r>
             <a:r>
-              <a:rPr lang="en-US" altLang="zh-CN" kern="0" dirty="0">
+              <a:rPr lang="en-US" altLang="zh-CN" sz="1400" kern="0" dirty="0">
                 <a:solidFill>
                   <a:srgbClr val="098658"/>
                 </a:solidFill>
@@ -10557,7 +10581,7 @@
               <a:t>1</a:t>
             </a:r>
             <a:r>
-              <a:rPr lang="en-US" altLang="zh-CN" kern="0" dirty="0">
+              <a:rPr lang="en-US" altLang="zh-CN" sz="1400" kern="0" dirty="0">
                 <a:solidFill>
                   <a:srgbClr val="000000"/>
                 </a:solidFill>
@@ -10568,7 +10592,7 @@
               </a:rPr>
               <a:t>);</a:t>
             </a:r>
-            <a:endParaRPr lang="zh-CN" altLang="zh-CN" kern="100" dirty="0">
+            <a:endParaRPr lang="zh-CN" altLang="zh-CN" sz="1400" kern="100" dirty="0">
               <a:effectLst/>
               <a:latin typeface="DengXian" panose="02010600030101010101" pitchFamily="2" charset="-122"/>
               <a:ea typeface="DengXian" panose="02010600030101010101" pitchFamily="2" charset="-122"/>
@@ -10578,7 +10602,7 @@
           <a:p>
             <a:pPr algn="l"/>
             <a:r>
-              <a:rPr lang="en-US" altLang="zh-CN" kern="0" dirty="0">
+              <a:rPr lang="en-US" altLang="zh-CN" sz="1400" kern="0" dirty="0">
                 <a:solidFill>
                   <a:srgbClr val="000000"/>
                 </a:solidFill>
@@ -10590,7 +10614,7 @@
               <a:t>    </a:t>
             </a:r>
             <a:r>
-              <a:rPr lang="en-US" altLang="zh-CN" kern="0" dirty="0">
+              <a:rPr lang="en-US" altLang="zh-CN" sz="1400" kern="0" dirty="0">
                 <a:solidFill>
                   <a:srgbClr val="001080"/>
                 </a:solidFill>
@@ -10602,7 +10626,7 @@
               <a:t>p</a:t>
             </a:r>
             <a:r>
-              <a:rPr lang="en-US" altLang="zh-CN" kern="0" dirty="0">
+              <a:rPr lang="en-US" altLang="zh-CN" sz="1400" kern="0" dirty="0">
                 <a:solidFill>
                   <a:srgbClr val="000000"/>
                 </a:solidFill>
@@ -10614,7 +10638,7 @@
               <a:t> += </a:t>
             </a:r>
             <a:r>
-              <a:rPr lang="en-US" altLang="zh-CN" kern="0" dirty="0">
+              <a:rPr lang="en-US" altLang="zh-CN" sz="1400" kern="0" dirty="0">
                 <a:solidFill>
                   <a:srgbClr val="098658"/>
                 </a:solidFill>
@@ -10626,7 +10650,7 @@
               <a:t>3</a:t>
             </a:r>
             <a:r>
-              <a:rPr lang="en-US" altLang="zh-CN" kern="0" dirty="0">
+              <a:rPr lang="en-US" altLang="zh-CN" sz="1400" kern="0" dirty="0">
                 <a:solidFill>
                   <a:srgbClr val="000000"/>
                 </a:solidFill>
@@ -10637,7 +10661,7 @@
               </a:rPr>
               <a:t>;</a:t>
             </a:r>
-            <a:endParaRPr lang="zh-CN" altLang="zh-CN" kern="100" dirty="0">
+            <a:endParaRPr lang="zh-CN" altLang="zh-CN" sz="1400" kern="100" dirty="0">
               <a:effectLst/>
               <a:latin typeface="DengXian" panose="02010600030101010101" pitchFamily="2" charset="-122"/>
               <a:ea typeface="DengXian" panose="02010600030101010101" pitchFamily="2" charset="-122"/>
@@ -10647,7 +10671,7 @@
           <a:p>
             <a:pPr algn="l"/>
             <a:r>
-              <a:rPr lang="en-US" altLang="zh-CN" kern="0" dirty="0">
+              <a:rPr lang="en-US" altLang="zh-CN" sz="1400" kern="0" dirty="0">
                 <a:solidFill>
                   <a:srgbClr val="000000"/>
                 </a:solidFill>
@@ -10659,7 +10683,7 @@
               <a:t>    </a:t>
             </a:r>
             <a:r>
-              <a:rPr lang="en-US" altLang="zh-CN" kern="0" dirty="0" err="1">
+              <a:rPr lang="en-US" altLang="zh-CN" sz="1400" kern="0" dirty="0" err="1">
                 <a:solidFill>
                   <a:srgbClr val="001080"/>
                 </a:solidFill>
@@ -10671,7 +10695,7 @@
               <a:t>cout</a:t>
             </a:r>
             <a:r>
-              <a:rPr lang="en-US" altLang="zh-CN" kern="0" dirty="0">
+              <a:rPr lang="en-US" altLang="zh-CN" sz="1400" kern="0" dirty="0">
                 <a:solidFill>
                   <a:srgbClr val="000000"/>
                 </a:solidFill>
@@ -10683,7 +10707,7 @@
               <a:t> </a:t>
             </a:r>
             <a:r>
-              <a:rPr lang="en-US" altLang="zh-CN" kern="0" dirty="0">
+              <a:rPr lang="en-US" altLang="zh-CN" sz="1400" kern="0" dirty="0">
                 <a:solidFill>
                   <a:srgbClr val="795E26"/>
                 </a:solidFill>
@@ -10695,7 +10719,7 @@
               <a:t>&lt;&lt;</a:t>
             </a:r>
             <a:r>
-              <a:rPr lang="en-US" altLang="zh-CN" kern="0" dirty="0">
+              <a:rPr lang="en-US" altLang="zh-CN" sz="1400" kern="0" dirty="0">
                 <a:solidFill>
                   <a:srgbClr val="000000"/>
                 </a:solidFill>
@@ -10707,7 +10731,7 @@
               <a:t> </a:t>
             </a:r>
             <a:r>
-              <a:rPr lang="en-US" altLang="zh-CN" kern="0" dirty="0">
+              <a:rPr lang="en-US" altLang="zh-CN" sz="1400" kern="0" dirty="0">
                 <a:solidFill>
                   <a:srgbClr val="A31515"/>
                 </a:solidFill>
@@ -10719,7 +10743,7 @@
               <a:t>"*p++ = "</a:t>
             </a:r>
             <a:r>
-              <a:rPr lang="en-US" altLang="zh-CN" kern="0" dirty="0">
+              <a:rPr lang="en-US" altLang="zh-CN" sz="1400" kern="0" dirty="0">
                 <a:solidFill>
                   <a:srgbClr val="000000"/>
                 </a:solidFill>
@@ -10731,7 +10755,7 @@
               <a:t> </a:t>
             </a:r>
             <a:r>
-              <a:rPr lang="en-US" altLang="zh-CN" kern="0" dirty="0">
+              <a:rPr lang="en-US" altLang="zh-CN" sz="1400" kern="0" dirty="0">
                 <a:solidFill>
                   <a:srgbClr val="795E26"/>
                 </a:solidFill>
@@ -10743,7 +10767,7 @@
               <a:t>&lt;&lt;</a:t>
             </a:r>
             <a:r>
-              <a:rPr lang="en-US" altLang="zh-CN" kern="0" dirty="0">
+              <a:rPr lang="en-US" altLang="zh-CN" sz="1400" kern="0" dirty="0">
                 <a:solidFill>
                   <a:srgbClr val="000000"/>
                 </a:solidFill>
@@ -10755,7 +10779,7 @@
               <a:t> *</a:t>
             </a:r>
             <a:r>
-              <a:rPr lang="en-US" altLang="zh-CN" kern="0" dirty="0">
+              <a:rPr lang="en-US" altLang="zh-CN" sz="1400" kern="0" dirty="0">
                 <a:solidFill>
                   <a:srgbClr val="001080"/>
                 </a:solidFill>
@@ -10767,7 +10791,7 @@
               <a:t>p</a:t>
             </a:r>
             <a:r>
-              <a:rPr lang="en-US" altLang="zh-CN" kern="0" dirty="0">
+              <a:rPr lang="en-US" altLang="zh-CN" sz="1400" kern="0" dirty="0">
                 <a:solidFill>
                   <a:srgbClr val="000000"/>
                 </a:solidFill>
@@ -10779,7 +10803,7 @@
               <a:t>++ </a:t>
             </a:r>
             <a:r>
-              <a:rPr lang="en-US" altLang="zh-CN" kern="0" dirty="0">
+              <a:rPr lang="en-US" altLang="zh-CN" sz="1400" kern="0" dirty="0">
                 <a:solidFill>
                   <a:srgbClr val="795E26"/>
                 </a:solidFill>
@@ -10791,7 +10815,7 @@
               <a:t>&lt;&lt;</a:t>
             </a:r>
             <a:r>
-              <a:rPr lang="en-US" altLang="zh-CN" kern="0" dirty="0">
+              <a:rPr lang="en-US" altLang="zh-CN" sz="1400" kern="0" dirty="0">
                 <a:solidFill>
                   <a:srgbClr val="000000"/>
                 </a:solidFill>
@@ -10803,7 +10827,7 @@
               <a:t> </a:t>
             </a:r>
             <a:r>
-              <a:rPr lang="en-US" altLang="zh-CN" kern="0" dirty="0" err="1">
+              <a:rPr lang="en-US" altLang="zh-CN" sz="1400" kern="0" dirty="0" err="1">
                 <a:solidFill>
                   <a:srgbClr val="795E26"/>
                 </a:solidFill>
@@ -10815,7 +10839,7 @@
               <a:t>endl</a:t>
             </a:r>
             <a:r>
-              <a:rPr lang="en-US" altLang="zh-CN" kern="0" dirty="0">
+              <a:rPr lang="en-US" altLang="zh-CN" sz="1400" kern="0" dirty="0">
                 <a:solidFill>
                   <a:srgbClr val="000000"/>
                 </a:solidFill>
@@ -10826,7 +10850,7 @@
               </a:rPr>
               <a:t>; </a:t>
             </a:r>
-            <a:endParaRPr lang="zh-CN" altLang="zh-CN" kern="100" dirty="0">
+            <a:endParaRPr lang="zh-CN" altLang="zh-CN" sz="1400" kern="100" dirty="0">
               <a:effectLst/>
               <a:latin typeface="DengXian" panose="02010600030101010101" pitchFamily="2" charset="-122"/>
               <a:ea typeface="DengXian" panose="02010600030101010101" pitchFamily="2" charset="-122"/>
@@ -10836,7 +10860,7 @@
           <a:p>
             <a:pPr algn="l"/>
             <a:r>
-              <a:rPr lang="en-US" altLang="zh-CN" kern="0" dirty="0">
+              <a:rPr lang="en-US" altLang="zh-CN" sz="1400" kern="0" dirty="0">
                 <a:solidFill>
                   <a:srgbClr val="000000"/>
                 </a:solidFill>
@@ -10847,7 +10871,7 @@
               </a:rPr>
               <a:t> </a:t>
             </a:r>
-            <a:endParaRPr lang="zh-CN" altLang="zh-CN" kern="100" dirty="0">
+            <a:endParaRPr lang="zh-CN" altLang="zh-CN" sz="1400" kern="100" dirty="0">
               <a:effectLst/>
               <a:latin typeface="DengXian" panose="02010600030101010101" pitchFamily="2" charset="-122"/>
               <a:ea typeface="DengXian" panose="02010600030101010101" pitchFamily="2" charset="-122"/>
@@ -10857,7 +10881,7 @@
           <a:p>
             <a:pPr algn="l"/>
             <a:r>
-              <a:rPr lang="en-US" altLang="zh-CN" kern="0" dirty="0">
+              <a:rPr lang="en-US" altLang="zh-CN" sz="1400" kern="0" dirty="0">
                 <a:solidFill>
                   <a:srgbClr val="000000"/>
                 </a:solidFill>
@@ -10869,7 +10893,7 @@
               <a:t>    </a:t>
             </a:r>
             <a:r>
-              <a:rPr lang="en-US" altLang="zh-CN" kern="0" dirty="0">
+              <a:rPr lang="en-US" altLang="zh-CN" sz="1400" kern="0" dirty="0">
                 <a:solidFill>
                   <a:srgbClr val="0000FF"/>
                 </a:solidFill>
@@ -10881,7 +10905,7 @@
               <a:t>const</a:t>
             </a:r>
             <a:r>
-              <a:rPr lang="en-US" altLang="zh-CN" kern="0" dirty="0">
+              <a:rPr lang="en-US" altLang="zh-CN" sz="1400" kern="0" dirty="0">
                 <a:solidFill>
                   <a:srgbClr val="000000"/>
                 </a:solidFill>
@@ -10893,7 +10917,7 @@
               <a:t> </a:t>
             </a:r>
             <a:r>
-              <a:rPr lang="en-US" altLang="zh-CN" kern="0" dirty="0">
+              <a:rPr lang="en-US" altLang="zh-CN" sz="1400" kern="0" dirty="0">
                 <a:solidFill>
                   <a:srgbClr val="0000FF"/>
                 </a:solidFill>
@@ -10905,7 +10929,7 @@
               <a:t>char</a:t>
             </a:r>
             <a:r>
-              <a:rPr lang="en-US" altLang="zh-CN" kern="0" dirty="0">
+              <a:rPr lang="en-US" altLang="zh-CN" sz="1400" kern="0" dirty="0">
                 <a:solidFill>
                   <a:srgbClr val="000000"/>
                 </a:solidFill>
@@ -10917,7 +10941,7 @@
               <a:t> </a:t>
             </a:r>
             <a:r>
-              <a:rPr lang="en-US" altLang="zh-CN" kern="0" dirty="0">
+              <a:rPr lang="en-US" altLang="zh-CN" sz="1400" kern="0" dirty="0">
                 <a:solidFill>
                   <a:srgbClr val="0000FF"/>
                 </a:solidFill>
@@ -10929,7 +10953,7 @@
               <a:t>*</a:t>
             </a:r>
             <a:r>
-              <a:rPr lang="en-US" altLang="zh-CN" kern="0" dirty="0">
+              <a:rPr lang="en-US" altLang="zh-CN" sz="1400" kern="0" dirty="0">
                 <a:solidFill>
                   <a:srgbClr val="001080"/>
                 </a:solidFill>
@@ -10941,7 +10965,7 @@
               <a:t>str</a:t>
             </a:r>
             <a:r>
-              <a:rPr lang="en-US" altLang="zh-CN" kern="0" dirty="0">
+              <a:rPr lang="en-US" altLang="zh-CN" sz="1400" kern="0" dirty="0">
                 <a:solidFill>
                   <a:srgbClr val="000000"/>
                 </a:solidFill>
@@ -10953,7 +10977,7 @@
               <a:t> = </a:t>
             </a:r>
             <a:r>
-              <a:rPr lang="en-US" altLang="zh-CN" kern="0" dirty="0">
+              <a:rPr lang="en-US" altLang="zh-CN" sz="1400" kern="0" dirty="0">
                 <a:solidFill>
                   <a:srgbClr val="A31515"/>
                 </a:solidFill>
@@ -10965,7 +10989,7 @@
               <a:t>"Welcome to programming."</a:t>
             </a:r>
             <a:r>
-              <a:rPr lang="en-US" altLang="zh-CN" kern="0" dirty="0">
+              <a:rPr lang="en-US" altLang="zh-CN" sz="1400" kern="0" dirty="0">
                 <a:solidFill>
                   <a:srgbClr val="000000"/>
                 </a:solidFill>
@@ -10976,7 +11000,7 @@
               </a:rPr>
               <a:t>;</a:t>
             </a:r>
-            <a:endParaRPr lang="zh-CN" altLang="zh-CN" kern="100" dirty="0">
+            <a:endParaRPr lang="zh-CN" altLang="zh-CN" sz="1400" kern="100" dirty="0">
               <a:effectLst/>
               <a:latin typeface="DengXian" panose="02010600030101010101" pitchFamily="2" charset="-122"/>
               <a:ea typeface="DengXian" panose="02010600030101010101" pitchFamily="2" charset="-122"/>
@@ -10986,7 +11010,7 @@
           <a:p>
             <a:pPr algn="l"/>
             <a:r>
-              <a:rPr lang="en-US" altLang="zh-CN" kern="0" dirty="0">
+              <a:rPr lang="en-US" altLang="zh-CN" sz="1400" kern="0" dirty="0">
                 <a:solidFill>
                   <a:srgbClr val="000000"/>
                 </a:solidFill>
@@ -10998,7 +11022,7 @@
               <a:t>    </a:t>
             </a:r>
             <a:r>
-              <a:rPr lang="en-US" altLang="zh-CN" kern="0" dirty="0">
+              <a:rPr lang="en-US" altLang="zh-CN" sz="1400" kern="0" dirty="0">
                 <a:solidFill>
                   <a:srgbClr val="0000FF"/>
                 </a:solidFill>
@@ -11010,7 +11034,7 @@
               <a:t>long</a:t>
             </a:r>
             <a:r>
-              <a:rPr lang="en-US" altLang="zh-CN" kern="0" dirty="0">
+              <a:rPr lang="en-US" altLang="zh-CN" sz="1400" kern="0" dirty="0">
                 <a:solidFill>
                   <a:srgbClr val="000000"/>
                 </a:solidFill>
@@ -11022,7 +11046,7 @@
               <a:t> </a:t>
             </a:r>
             <a:r>
-              <a:rPr lang="en-US" altLang="zh-CN" kern="0" dirty="0">
+              <a:rPr lang="en-US" altLang="zh-CN" sz="1400" kern="0" dirty="0">
                 <a:solidFill>
                   <a:srgbClr val="0000FF"/>
                 </a:solidFill>
@@ -11034,7 +11058,7 @@
               <a:t>*</a:t>
             </a:r>
             <a:r>
-              <a:rPr lang="en-US" altLang="zh-CN" kern="0" dirty="0">
+              <a:rPr lang="en-US" altLang="zh-CN" sz="1400" kern="0" dirty="0">
                 <a:solidFill>
                   <a:srgbClr val="001080"/>
                 </a:solidFill>
@@ -11046,7 +11070,7 @@
               <a:t>q</a:t>
             </a:r>
             <a:r>
-              <a:rPr lang="en-US" altLang="zh-CN" kern="0" dirty="0">
+              <a:rPr lang="en-US" altLang="zh-CN" sz="1400" kern="0" dirty="0">
                 <a:solidFill>
                   <a:srgbClr val="000000"/>
                 </a:solidFill>
@@ -11058,7 +11082,7 @@
               <a:t> = (</a:t>
             </a:r>
             <a:r>
-              <a:rPr lang="en-US" altLang="zh-CN" kern="0" dirty="0">
+              <a:rPr lang="en-US" altLang="zh-CN" sz="1400" kern="0" dirty="0">
                 <a:solidFill>
                   <a:srgbClr val="0000FF"/>
                 </a:solidFill>
@@ -11070,7 +11094,7 @@
               <a:t>long</a:t>
             </a:r>
             <a:r>
-              <a:rPr lang="en-US" altLang="zh-CN" kern="0" dirty="0">
+              <a:rPr lang="en-US" altLang="zh-CN" sz="1400" kern="0" dirty="0">
                 <a:solidFill>
                   <a:srgbClr val="000000"/>
                 </a:solidFill>
@@ -11082,7 +11106,7 @@
               <a:t> *)</a:t>
             </a:r>
             <a:r>
-              <a:rPr lang="en-US" altLang="zh-CN" kern="0" dirty="0">
+              <a:rPr lang="en-US" altLang="zh-CN" sz="1400" kern="0" dirty="0">
                 <a:solidFill>
                   <a:srgbClr val="001080"/>
                 </a:solidFill>
@@ -11094,7 +11118,7 @@
               <a:t>str</a:t>
             </a:r>
             <a:r>
-              <a:rPr lang="en-US" altLang="zh-CN" kern="0" dirty="0">
+              <a:rPr lang="en-US" altLang="zh-CN" sz="1400" kern="0" dirty="0">
                 <a:solidFill>
                   <a:srgbClr val="000000"/>
                 </a:solidFill>
@@ -11105,7 +11129,7 @@
               </a:rPr>
               <a:t>;</a:t>
             </a:r>
-            <a:endParaRPr lang="zh-CN" altLang="zh-CN" kern="100" dirty="0">
+            <a:endParaRPr lang="zh-CN" altLang="zh-CN" sz="1400" kern="100" dirty="0">
               <a:effectLst/>
               <a:latin typeface="DengXian" panose="02010600030101010101" pitchFamily="2" charset="-122"/>
               <a:ea typeface="DengXian" panose="02010600030101010101" pitchFamily="2" charset="-122"/>
@@ -11115,7 +11139,7 @@
           <a:p>
             <a:pPr algn="l"/>
             <a:r>
-              <a:rPr lang="en-US" altLang="zh-CN" kern="0" dirty="0">
+              <a:rPr lang="en-US" altLang="zh-CN" sz="1400" kern="0" dirty="0">
                 <a:solidFill>
                   <a:srgbClr val="000000"/>
                 </a:solidFill>
@@ -11127,7 +11151,7 @@
               <a:t>    </a:t>
             </a:r>
             <a:r>
-              <a:rPr lang="en-US" altLang="zh-CN" kern="0" dirty="0">
+              <a:rPr lang="en-US" altLang="zh-CN" sz="1400" kern="0" dirty="0">
                 <a:solidFill>
                   <a:srgbClr val="001080"/>
                 </a:solidFill>
@@ -11139,7 +11163,7 @@
               <a:t>q</a:t>
             </a:r>
             <a:r>
-              <a:rPr lang="en-US" altLang="zh-CN" kern="0" dirty="0">
+              <a:rPr lang="en-US" altLang="zh-CN" sz="1400" kern="0" dirty="0">
                 <a:solidFill>
                   <a:srgbClr val="000000"/>
                 </a:solidFill>
@@ -11150,7 +11174,7 @@
               </a:rPr>
               <a:t>++;</a:t>
             </a:r>
-            <a:endParaRPr lang="zh-CN" altLang="zh-CN" kern="100" dirty="0">
+            <a:endParaRPr lang="zh-CN" altLang="zh-CN" sz="1400" kern="100" dirty="0">
               <a:effectLst/>
               <a:latin typeface="DengXian" panose="02010600030101010101" pitchFamily="2" charset="-122"/>
               <a:ea typeface="DengXian" panose="02010600030101010101" pitchFamily="2" charset="-122"/>
@@ -11160,7 +11184,7 @@
           <a:p>
             <a:pPr algn="l"/>
             <a:r>
-              <a:rPr lang="en-US" altLang="zh-CN" kern="0" dirty="0">
+              <a:rPr lang="en-US" altLang="zh-CN" sz="1400" kern="0" dirty="0">
                 <a:solidFill>
                   <a:srgbClr val="000000"/>
                 </a:solidFill>
@@ -11172,7 +11196,7 @@
               <a:t>    </a:t>
             </a:r>
             <a:r>
-              <a:rPr lang="en-US" altLang="zh-CN" kern="0" dirty="0">
+              <a:rPr lang="en-US" altLang="zh-CN" sz="1400" kern="0" dirty="0">
                 <a:solidFill>
                   <a:srgbClr val="0000FF"/>
                 </a:solidFill>
@@ -11184,7 +11208,7 @@
               <a:t>char</a:t>
             </a:r>
             <a:r>
-              <a:rPr lang="en-US" altLang="zh-CN" kern="0" dirty="0">
+              <a:rPr lang="en-US" altLang="zh-CN" sz="1400" kern="0" dirty="0">
                 <a:solidFill>
                   <a:srgbClr val="000000"/>
                 </a:solidFill>
@@ -11196,7 +11220,7 @@
               <a:t> </a:t>
             </a:r>
             <a:r>
-              <a:rPr lang="en-US" altLang="zh-CN" kern="0" dirty="0">
+              <a:rPr lang="en-US" altLang="zh-CN" sz="1400" kern="0" dirty="0">
                 <a:solidFill>
                   <a:srgbClr val="0000FF"/>
                 </a:solidFill>
@@ -11208,7 +11232,7 @@
               <a:t>*</a:t>
             </a:r>
             <a:r>
-              <a:rPr lang="en-US" altLang="zh-CN" kern="0" dirty="0">
+              <a:rPr lang="en-US" altLang="zh-CN" sz="1400" kern="0" dirty="0">
                 <a:solidFill>
                   <a:srgbClr val="001080"/>
                 </a:solidFill>
@@ -11220,7 +11244,7 @@
               <a:t>r</a:t>
             </a:r>
             <a:r>
-              <a:rPr lang="en-US" altLang="zh-CN" kern="0" dirty="0">
+              <a:rPr lang="en-US" altLang="zh-CN" sz="1400" kern="0" dirty="0">
                 <a:solidFill>
                   <a:srgbClr val="000000"/>
                 </a:solidFill>
@@ -11232,7 +11256,7 @@
               <a:t> = (</a:t>
             </a:r>
             <a:r>
-              <a:rPr lang="en-US" altLang="zh-CN" kern="0" dirty="0">
+              <a:rPr lang="en-US" altLang="zh-CN" sz="1400" kern="0" dirty="0">
                 <a:solidFill>
                   <a:srgbClr val="0000FF"/>
                 </a:solidFill>
@@ -11244,7 +11268,7 @@
               <a:t>char</a:t>
             </a:r>
             <a:r>
-              <a:rPr lang="en-US" altLang="zh-CN" kern="0" dirty="0">
+              <a:rPr lang="en-US" altLang="zh-CN" sz="1400" kern="0" dirty="0">
                 <a:solidFill>
                   <a:srgbClr val="000000"/>
                 </a:solidFill>
@@ -11256,7 +11280,7 @@
               <a:t> *)</a:t>
             </a:r>
             <a:r>
-              <a:rPr lang="en-US" altLang="zh-CN" kern="0" dirty="0">
+              <a:rPr lang="en-US" altLang="zh-CN" sz="1400" kern="0" dirty="0">
                 <a:solidFill>
                   <a:srgbClr val="001080"/>
                 </a:solidFill>
@@ -11268,7 +11292,7 @@
               <a:t>q</a:t>
             </a:r>
             <a:r>
-              <a:rPr lang="en-US" altLang="zh-CN" kern="0" dirty="0">
+              <a:rPr lang="en-US" altLang="zh-CN" sz="1400" kern="0" dirty="0">
                 <a:solidFill>
                   <a:srgbClr val="000000"/>
                 </a:solidFill>
@@ -11279,7 +11303,7 @@
               </a:rPr>
               <a:t>;</a:t>
             </a:r>
-            <a:endParaRPr lang="zh-CN" altLang="zh-CN" kern="100" dirty="0">
+            <a:endParaRPr lang="zh-CN" altLang="zh-CN" sz="1400" kern="100" dirty="0">
               <a:effectLst/>
               <a:latin typeface="DengXian" panose="02010600030101010101" pitchFamily="2" charset="-122"/>
               <a:ea typeface="DengXian" panose="02010600030101010101" pitchFamily="2" charset="-122"/>
@@ -11289,7 +11313,7 @@
           <a:p>
             <a:pPr algn="l"/>
             <a:r>
-              <a:rPr lang="en-US" altLang="zh-CN" kern="0" dirty="0">
+              <a:rPr lang="en-US" altLang="zh-CN" sz="1400" kern="0" dirty="0">
                 <a:solidFill>
                   <a:srgbClr val="000000"/>
                 </a:solidFill>
@@ -11301,7 +11325,7 @@
               <a:t>    </a:t>
             </a:r>
             <a:r>
-              <a:rPr lang="en-US" altLang="zh-CN" kern="0" dirty="0" err="1">
+              <a:rPr lang="en-US" altLang="zh-CN" sz="1400" kern="0" dirty="0" err="1">
                 <a:solidFill>
                   <a:srgbClr val="001080"/>
                 </a:solidFill>
@@ -11313,7 +11337,7 @@
               <a:t>cout</a:t>
             </a:r>
             <a:r>
-              <a:rPr lang="en-US" altLang="zh-CN" kern="0" dirty="0">
+              <a:rPr lang="en-US" altLang="zh-CN" sz="1400" kern="0" dirty="0">
                 <a:solidFill>
                   <a:srgbClr val="000000"/>
                 </a:solidFill>
@@ -11325,7 +11349,7 @@
               <a:t> </a:t>
             </a:r>
             <a:r>
-              <a:rPr lang="en-US" altLang="zh-CN" kern="0" dirty="0">
+              <a:rPr lang="en-US" altLang="zh-CN" sz="1400" kern="0" dirty="0">
                 <a:solidFill>
                   <a:srgbClr val="795E26"/>
                 </a:solidFill>
@@ -11337,7 +11361,7 @@
               <a:t>&lt;&lt;</a:t>
             </a:r>
             <a:r>
-              <a:rPr lang="en-US" altLang="zh-CN" kern="0" dirty="0">
+              <a:rPr lang="en-US" altLang="zh-CN" sz="1400" kern="0" dirty="0">
                 <a:solidFill>
                   <a:srgbClr val="000000"/>
                 </a:solidFill>
@@ -11349,7 +11373,7 @@
               <a:t> </a:t>
             </a:r>
             <a:r>
-              <a:rPr lang="en-US" altLang="zh-CN" kern="0" dirty="0">
+              <a:rPr lang="en-US" altLang="zh-CN" sz="1400" kern="0" dirty="0">
                 <a:solidFill>
                   <a:srgbClr val="001080"/>
                 </a:solidFill>
@@ -11361,7 +11385,7 @@
               <a:t>r</a:t>
             </a:r>
             <a:r>
-              <a:rPr lang="en-US" altLang="zh-CN" kern="0" dirty="0">
+              <a:rPr lang="en-US" altLang="zh-CN" sz="1400" kern="0" dirty="0">
                 <a:solidFill>
                   <a:srgbClr val="000000"/>
                 </a:solidFill>
@@ -11373,7 +11397,7 @@
               <a:t> </a:t>
             </a:r>
             <a:r>
-              <a:rPr lang="en-US" altLang="zh-CN" kern="0" dirty="0">
+              <a:rPr lang="en-US" altLang="zh-CN" sz="1400" kern="0" dirty="0">
                 <a:solidFill>
                   <a:srgbClr val="795E26"/>
                 </a:solidFill>
@@ -11385,7 +11409,7 @@
               <a:t>&lt;&lt;</a:t>
             </a:r>
             <a:r>
-              <a:rPr lang="en-US" altLang="zh-CN" kern="0" dirty="0">
+              <a:rPr lang="en-US" altLang="zh-CN" sz="1400" kern="0" dirty="0">
                 <a:solidFill>
                   <a:srgbClr val="000000"/>
                 </a:solidFill>
@@ -11397,7 +11421,7 @@
               <a:t> </a:t>
             </a:r>
             <a:r>
-              <a:rPr lang="en-US" altLang="zh-CN" kern="0" dirty="0" err="1">
+              <a:rPr lang="en-US" altLang="zh-CN" sz="1400" kern="0" dirty="0" err="1">
                 <a:solidFill>
                   <a:srgbClr val="795E26"/>
                 </a:solidFill>
@@ -11409,7 +11433,7 @@
               <a:t>endl</a:t>
             </a:r>
             <a:r>
-              <a:rPr lang="en-US" altLang="zh-CN" kern="0" dirty="0">
+              <a:rPr lang="en-US" altLang="zh-CN" sz="1400" kern="0" dirty="0">
                 <a:solidFill>
                   <a:srgbClr val="000000"/>
                 </a:solidFill>
@@ -11420,7 +11444,7 @@
               </a:rPr>
               <a:t>;</a:t>
             </a:r>
-            <a:endParaRPr lang="zh-CN" altLang="zh-CN" kern="100" dirty="0">
+            <a:endParaRPr lang="zh-CN" altLang="zh-CN" sz="1400" kern="100" dirty="0">
               <a:effectLst/>
               <a:latin typeface="DengXian" panose="02010600030101010101" pitchFamily="2" charset="-122"/>
               <a:ea typeface="DengXian" panose="02010600030101010101" pitchFamily="2" charset="-122"/>
@@ -11430,7 +11454,7 @@
           <a:p>
             <a:pPr algn="l"/>
             <a:r>
-              <a:rPr lang="en-US" altLang="zh-CN" kern="0" dirty="0">
+              <a:rPr lang="en-US" altLang="zh-CN" sz="1400" kern="0" dirty="0">
                 <a:solidFill>
                   <a:srgbClr val="000000"/>
                 </a:solidFill>
@@ -11441,7 +11465,7 @@
               </a:rPr>
               <a:t> </a:t>
             </a:r>
-            <a:endParaRPr lang="zh-CN" altLang="zh-CN" kern="100" dirty="0">
+            <a:endParaRPr lang="zh-CN" altLang="zh-CN" sz="1400" kern="100" dirty="0">
               <a:effectLst/>
               <a:latin typeface="DengXian" panose="02010600030101010101" pitchFamily="2" charset="-122"/>
               <a:ea typeface="DengXian" panose="02010600030101010101" pitchFamily="2" charset="-122"/>
@@ -11451,7 +11475,7 @@
           <a:p>
             <a:pPr algn="l"/>
             <a:r>
-              <a:rPr lang="en-US" altLang="zh-CN" kern="0" dirty="0">
+              <a:rPr lang="en-US" altLang="zh-CN" sz="1400" kern="0" dirty="0">
                 <a:solidFill>
                   <a:srgbClr val="000000"/>
                 </a:solidFill>
@@ -11463,7 +11487,7 @@
               <a:t>    </a:t>
             </a:r>
             <a:r>
-              <a:rPr lang="en-US" altLang="zh-CN" kern="0" dirty="0">
+              <a:rPr lang="en-US" altLang="zh-CN" sz="1400" kern="0" dirty="0">
                 <a:solidFill>
                   <a:srgbClr val="0000FF"/>
                 </a:solidFill>
@@ -11475,7 +11499,7 @@
               <a:t>unsigned</a:t>
             </a:r>
             <a:r>
-              <a:rPr lang="en-US" altLang="zh-CN" kern="0" dirty="0">
+              <a:rPr lang="en-US" altLang="zh-CN" sz="1400" kern="0" dirty="0">
                 <a:solidFill>
                   <a:srgbClr val="000000"/>
                 </a:solidFill>
@@ -11487,7 +11511,7 @@
               <a:t> </a:t>
             </a:r>
             <a:r>
-              <a:rPr lang="en-US" altLang="zh-CN" kern="0" dirty="0">
+              <a:rPr lang="en-US" altLang="zh-CN" sz="1400" kern="0" dirty="0">
                 <a:solidFill>
                   <a:srgbClr val="0000FF"/>
                 </a:solidFill>
@@ -11499,7 +11523,7 @@
               <a:t>int</a:t>
             </a:r>
             <a:r>
-              <a:rPr lang="en-US" altLang="zh-CN" kern="0" dirty="0">
+              <a:rPr lang="en-US" altLang="zh-CN" sz="1400" kern="0" dirty="0">
                 <a:solidFill>
                   <a:srgbClr val="000000"/>
                 </a:solidFill>
@@ -11511,7 +11535,7 @@
               <a:t> </a:t>
             </a:r>
             <a:r>
-              <a:rPr lang="en-US" altLang="zh-CN" kern="0" dirty="0">
+              <a:rPr lang="en-US" altLang="zh-CN" sz="1400" kern="0" dirty="0">
                 <a:solidFill>
                   <a:srgbClr val="001080"/>
                 </a:solidFill>
@@ -11523,7 +11547,7 @@
               <a:t>num</a:t>
             </a:r>
             <a:r>
-              <a:rPr lang="en-US" altLang="zh-CN" kern="0" dirty="0">
+              <a:rPr lang="en-US" altLang="zh-CN" sz="1400" kern="0" dirty="0">
                 <a:solidFill>
                   <a:srgbClr val="000000"/>
                 </a:solidFill>
@@ -11535,7 +11559,7 @@
               <a:t> = </a:t>
             </a:r>
             <a:r>
-              <a:rPr lang="en-US" altLang="zh-CN" kern="0" dirty="0">
+              <a:rPr lang="en-US" altLang="zh-CN" sz="1400" kern="0" dirty="0">
                 <a:solidFill>
                   <a:srgbClr val="098658"/>
                 </a:solidFill>
@@ -11547,7 +11571,7 @@
               <a:t>0x3E56AF67</a:t>
             </a:r>
             <a:r>
-              <a:rPr lang="en-US" altLang="zh-CN" kern="0" dirty="0">
+              <a:rPr lang="en-US" altLang="zh-CN" sz="1400" kern="0" dirty="0">
                 <a:solidFill>
                   <a:srgbClr val="000000"/>
                 </a:solidFill>
@@ -11558,7 +11582,7 @@
               </a:rPr>
               <a:t>;</a:t>
             </a:r>
-            <a:endParaRPr lang="zh-CN" altLang="zh-CN" kern="100" dirty="0">
+            <a:endParaRPr lang="zh-CN" altLang="zh-CN" sz="1400" kern="100" dirty="0">
               <a:effectLst/>
               <a:latin typeface="DengXian" panose="02010600030101010101" pitchFamily="2" charset="-122"/>
               <a:ea typeface="DengXian" panose="02010600030101010101" pitchFamily="2" charset="-122"/>
@@ -11568,7 +11592,7 @@
           <a:p>
             <a:pPr algn="l"/>
             <a:r>
-              <a:rPr lang="en-US" altLang="zh-CN" kern="0" dirty="0">
+              <a:rPr lang="en-US" altLang="zh-CN" sz="1400" kern="0" dirty="0">
                 <a:solidFill>
                   <a:srgbClr val="000000"/>
                 </a:solidFill>
@@ -11580,7 +11604,7 @@
               <a:t>    </a:t>
             </a:r>
             <a:r>
-              <a:rPr lang="en-US" altLang="zh-CN" kern="0" dirty="0">
+              <a:rPr lang="en-US" altLang="zh-CN" sz="1400" kern="0" dirty="0">
                 <a:solidFill>
                   <a:srgbClr val="0000FF"/>
                 </a:solidFill>
@@ -11592,7 +11616,7 @@
               <a:t>unsigned</a:t>
             </a:r>
             <a:r>
-              <a:rPr lang="en-US" altLang="zh-CN" kern="0" dirty="0">
+              <a:rPr lang="en-US" altLang="zh-CN" sz="1400" kern="0" dirty="0">
                 <a:solidFill>
                   <a:srgbClr val="000000"/>
                 </a:solidFill>
@@ -11604,7 +11628,7 @@
               <a:t> </a:t>
             </a:r>
             <a:r>
-              <a:rPr lang="en-US" altLang="zh-CN" kern="0" dirty="0">
+              <a:rPr lang="en-US" altLang="zh-CN" sz="1400" kern="0" dirty="0">
                 <a:solidFill>
                   <a:srgbClr val="0000FF"/>
                 </a:solidFill>
@@ -11616,7 +11640,7 @@
               <a:t>short</a:t>
             </a:r>
             <a:r>
-              <a:rPr lang="en-US" altLang="zh-CN" kern="0" dirty="0">
+              <a:rPr lang="en-US" altLang="zh-CN" sz="1400" kern="0" dirty="0">
                 <a:solidFill>
                   <a:srgbClr val="000000"/>
                 </a:solidFill>
@@ -11628,7 +11652,7 @@
               <a:t> </a:t>
             </a:r>
             <a:r>
-              <a:rPr lang="en-US" altLang="zh-CN" kern="0" dirty="0">
+              <a:rPr lang="en-US" altLang="zh-CN" sz="1400" kern="0" dirty="0">
                 <a:solidFill>
                   <a:srgbClr val="0000FF"/>
                 </a:solidFill>
@@ -11640,7 +11664,7 @@
               <a:t>*</a:t>
             </a:r>
             <a:r>
-              <a:rPr lang="en-US" altLang="zh-CN" kern="0" dirty="0" err="1">
+              <a:rPr lang="en-US" altLang="zh-CN" sz="1400" kern="0" dirty="0" err="1">
                 <a:solidFill>
                   <a:srgbClr val="001080"/>
                 </a:solidFill>
@@ -11652,7 +11676,7 @@
               <a:t>pshort</a:t>
             </a:r>
             <a:r>
-              <a:rPr lang="en-US" altLang="zh-CN" kern="0" dirty="0">
+              <a:rPr lang="en-US" altLang="zh-CN" sz="1400" kern="0" dirty="0">
                 <a:solidFill>
                   <a:srgbClr val="000000"/>
                 </a:solidFill>
@@ -11664,7 +11688,7 @@
               <a:t> = (</a:t>
             </a:r>
             <a:r>
-              <a:rPr lang="en-US" altLang="zh-CN" kern="0" dirty="0">
+              <a:rPr lang="en-US" altLang="zh-CN" sz="1400" kern="0" dirty="0">
                 <a:solidFill>
                   <a:srgbClr val="0000FF"/>
                 </a:solidFill>
@@ -11676,7 +11700,7 @@
               <a:t>unsigned</a:t>
             </a:r>
             <a:r>
-              <a:rPr lang="en-US" altLang="zh-CN" kern="0" dirty="0">
+              <a:rPr lang="en-US" altLang="zh-CN" sz="1400" kern="0" dirty="0">
                 <a:solidFill>
                   <a:srgbClr val="000000"/>
                 </a:solidFill>
@@ -11688,7 +11712,7 @@
               <a:t> </a:t>
             </a:r>
             <a:r>
-              <a:rPr lang="en-US" altLang="zh-CN" kern="0" dirty="0">
+              <a:rPr lang="en-US" altLang="zh-CN" sz="1400" kern="0" dirty="0">
                 <a:solidFill>
                   <a:srgbClr val="0000FF"/>
                 </a:solidFill>
@@ -11700,7 +11724,7 @@
               <a:t>short</a:t>
             </a:r>
             <a:r>
-              <a:rPr lang="en-US" altLang="zh-CN" kern="0" dirty="0">
+              <a:rPr lang="en-US" altLang="zh-CN" sz="1400" kern="0" dirty="0">
                 <a:solidFill>
                   <a:srgbClr val="000000"/>
                 </a:solidFill>
@@ -11712,7 +11736,7 @@
               <a:t> *) &amp;</a:t>
             </a:r>
             <a:r>
-              <a:rPr lang="en-US" altLang="zh-CN" kern="0" dirty="0">
+              <a:rPr lang="en-US" altLang="zh-CN" sz="1400" kern="0" dirty="0">
                 <a:solidFill>
                   <a:srgbClr val="001080"/>
                 </a:solidFill>
@@ -11724,7 +11748,7 @@
               <a:t>num</a:t>
             </a:r>
             <a:r>
-              <a:rPr lang="en-US" altLang="zh-CN" kern="0" dirty="0">
+              <a:rPr lang="en-US" altLang="zh-CN" sz="1400" kern="0" dirty="0">
                 <a:solidFill>
                   <a:srgbClr val="000000"/>
                 </a:solidFill>
@@ -11735,7 +11759,7 @@
               </a:rPr>
               <a:t>;</a:t>
             </a:r>
-            <a:endParaRPr lang="zh-CN" altLang="zh-CN" kern="100" dirty="0">
+            <a:endParaRPr lang="zh-CN" altLang="zh-CN" sz="1400" kern="100" dirty="0">
               <a:effectLst/>
               <a:latin typeface="DengXian" panose="02010600030101010101" pitchFamily="2" charset="-122"/>
               <a:ea typeface="DengXian" panose="02010600030101010101" pitchFamily="2" charset="-122"/>
@@ -11745,7 +11769,7 @@
           <a:p>
             <a:pPr algn="l"/>
             <a:r>
-              <a:rPr lang="en-US" altLang="zh-CN" kern="0" dirty="0">
+              <a:rPr lang="en-US" altLang="zh-CN" sz="1400" kern="0" dirty="0">
                 <a:solidFill>
                   <a:srgbClr val="000000"/>
                 </a:solidFill>
@@ -11757,7 +11781,7 @@
               <a:t>    </a:t>
             </a:r>
             <a:r>
-              <a:rPr lang="en-US" altLang="zh-CN" kern="0" dirty="0" err="1">
+              <a:rPr lang="en-US" altLang="zh-CN" sz="1400" kern="0" dirty="0" err="1">
                 <a:solidFill>
                   <a:srgbClr val="001080"/>
                 </a:solidFill>
@@ -11769,7 +11793,7 @@
               <a:t>cout</a:t>
             </a:r>
             <a:r>
-              <a:rPr lang="en-US" altLang="zh-CN" kern="0" dirty="0">
+              <a:rPr lang="en-US" altLang="zh-CN" sz="1400" kern="0" dirty="0">
                 <a:solidFill>
                   <a:srgbClr val="000000"/>
                 </a:solidFill>
@@ -11781,7 +11805,7 @@
               <a:t> </a:t>
             </a:r>
             <a:r>
-              <a:rPr lang="en-US" altLang="zh-CN" kern="0" dirty="0">
+              <a:rPr lang="en-US" altLang="zh-CN" sz="1400" kern="0" dirty="0">
                 <a:solidFill>
                   <a:srgbClr val="795E26"/>
                 </a:solidFill>
@@ -11793,7 +11817,7 @@
               <a:t>&lt;&lt;</a:t>
             </a:r>
             <a:r>
-              <a:rPr lang="en-US" altLang="zh-CN" kern="0" dirty="0">
+              <a:rPr lang="en-US" altLang="zh-CN" sz="1400" kern="0" dirty="0">
                 <a:solidFill>
                   <a:srgbClr val="000000"/>
                 </a:solidFill>
@@ -11805,7 +11829,7 @@
               <a:t> </a:t>
             </a:r>
             <a:r>
-              <a:rPr lang="en-US" altLang="zh-CN" kern="0" dirty="0">
+              <a:rPr lang="en-US" altLang="zh-CN" sz="1400" kern="0" dirty="0">
                 <a:solidFill>
                   <a:srgbClr val="A31515"/>
                 </a:solidFill>
@@ -11817,7 +11841,7 @@
               <a:t>"*</a:t>
             </a:r>
             <a:r>
-              <a:rPr lang="en-US" altLang="zh-CN" kern="0" dirty="0" err="1">
+              <a:rPr lang="en-US" altLang="zh-CN" sz="1400" kern="0" dirty="0" err="1">
                 <a:solidFill>
                   <a:srgbClr val="A31515"/>
                 </a:solidFill>
@@ -11829,7 +11853,7 @@
               <a:t>pshort</a:t>
             </a:r>
             <a:r>
-              <a:rPr lang="en-US" altLang="zh-CN" kern="0" dirty="0">
+              <a:rPr lang="en-US" altLang="zh-CN" sz="1400" kern="0" dirty="0">
                 <a:solidFill>
                   <a:srgbClr val="A31515"/>
                 </a:solidFill>
@@ -11841,7 +11865,7 @@
               <a:t> = 0x"</a:t>
             </a:r>
             <a:r>
-              <a:rPr lang="en-US" altLang="zh-CN" kern="0" dirty="0">
+              <a:rPr lang="en-US" altLang="zh-CN" sz="1400" kern="0" dirty="0">
                 <a:solidFill>
                   <a:srgbClr val="000000"/>
                 </a:solidFill>
@@ -11853,7 +11877,7 @@
               <a:t> </a:t>
             </a:r>
             <a:r>
-              <a:rPr lang="en-US" altLang="zh-CN" kern="0" dirty="0">
+              <a:rPr lang="en-US" altLang="zh-CN" sz="1400" kern="0" dirty="0">
                 <a:solidFill>
                   <a:srgbClr val="795E26"/>
                 </a:solidFill>
@@ -11865,7 +11889,7 @@
               <a:t>&lt;&lt;</a:t>
             </a:r>
             <a:r>
-              <a:rPr lang="en-US" altLang="zh-CN" kern="0" dirty="0">
+              <a:rPr lang="en-US" altLang="zh-CN" sz="1400" kern="0" dirty="0">
                 <a:solidFill>
                   <a:srgbClr val="000000"/>
                 </a:solidFill>
@@ -11877,7 +11901,7 @@
               <a:t>  </a:t>
             </a:r>
             <a:r>
-              <a:rPr lang="en-US" altLang="zh-CN" kern="0" dirty="0">
+              <a:rPr lang="en-US" altLang="zh-CN" sz="1400" kern="0" dirty="0">
                 <a:solidFill>
                   <a:srgbClr val="795E26"/>
                 </a:solidFill>
@@ -11889,7 +11913,7 @@
               <a:t>hex</a:t>
             </a:r>
             <a:r>
-              <a:rPr lang="en-US" altLang="zh-CN" kern="0" dirty="0">
+              <a:rPr lang="en-US" altLang="zh-CN" sz="1400" kern="0" dirty="0">
                 <a:solidFill>
                   <a:srgbClr val="000000"/>
                 </a:solidFill>
@@ -11901,7 +11925,7 @@
               <a:t> </a:t>
             </a:r>
             <a:r>
-              <a:rPr lang="en-US" altLang="zh-CN" kern="0" dirty="0">
+              <a:rPr lang="en-US" altLang="zh-CN" sz="1400" kern="0" dirty="0">
                 <a:solidFill>
                   <a:srgbClr val="795E26"/>
                 </a:solidFill>
@@ -11913,7 +11937,7 @@
               <a:t>&lt;&lt;</a:t>
             </a:r>
             <a:r>
-              <a:rPr lang="en-US" altLang="zh-CN" kern="0" dirty="0">
+              <a:rPr lang="en-US" altLang="zh-CN" sz="1400" kern="0" dirty="0">
                 <a:solidFill>
                   <a:srgbClr val="000000"/>
                 </a:solidFill>
@@ -11925,7 +11949,7 @@
               <a:t> *</a:t>
             </a:r>
             <a:r>
-              <a:rPr lang="en-US" altLang="zh-CN" kern="0" dirty="0" err="1">
+              <a:rPr lang="en-US" altLang="zh-CN" sz="1400" kern="0" dirty="0" err="1">
                 <a:solidFill>
                   <a:srgbClr val="001080"/>
                 </a:solidFill>
@@ -11937,7 +11961,7 @@
               <a:t>pshort</a:t>
             </a:r>
             <a:r>
-              <a:rPr lang="en-US" altLang="zh-CN" kern="0" dirty="0">
+              <a:rPr lang="en-US" altLang="zh-CN" sz="1400" kern="0" dirty="0">
                 <a:solidFill>
                   <a:srgbClr val="000000"/>
                 </a:solidFill>
@@ -11949,7 +11973,7 @@
               <a:t> </a:t>
             </a:r>
             <a:r>
-              <a:rPr lang="en-US" altLang="zh-CN" kern="0" dirty="0">
+              <a:rPr lang="en-US" altLang="zh-CN" sz="1400" kern="0" dirty="0">
                 <a:solidFill>
                   <a:srgbClr val="795E26"/>
                 </a:solidFill>
@@ -11961,7 +11985,7 @@
               <a:t>&lt;&lt;</a:t>
             </a:r>
             <a:r>
-              <a:rPr lang="en-US" altLang="zh-CN" kern="0" dirty="0">
+              <a:rPr lang="en-US" altLang="zh-CN" sz="1400" kern="0" dirty="0">
                 <a:solidFill>
                   <a:srgbClr val="000000"/>
                 </a:solidFill>
@@ -11973,7 +11997,7 @@
               <a:t> </a:t>
             </a:r>
             <a:r>
-              <a:rPr lang="en-US" altLang="zh-CN" kern="0" dirty="0" err="1">
+              <a:rPr lang="en-US" altLang="zh-CN" sz="1400" kern="0" dirty="0" err="1">
                 <a:solidFill>
                   <a:srgbClr val="795E26"/>
                 </a:solidFill>
@@ -11985,7 +12009,7 @@
               <a:t>endl</a:t>
             </a:r>
             <a:r>
-              <a:rPr lang="en-US" altLang="zh-CN" kern="0" dirty="0">
+              <a:rPr lang="en-US" altLang="zh-CN" sz="1400" kern="0" dirty="0">
                 <a:solidFill>
                   <a:srgbClr val="000000"/>
                 </a:solidFill>
@@ -11996,7 +12020,7 @@
               </a:rPr>
               <a:t>;</a:t>
             </a:r>
-            <a:endParaRPr lang="zh-CN" altLang="zh-CN" kern="100" dirty="0">
+            <a:endParaRPr lang="zh-CN" altLang="zh-CN" sz="1400" kern="100" dirty="0">
               <a:effectLst/>
               <a:latin typeface="DengXian" panose="02010600030101010101" pitchFamily="2" charset="-122"/>
               <a:ea typeface="DengXian" panose="02010600030101010101" pitchFamily="2" charset="-122"/>
@@ -12006,7 +12030,7 @@
           <a:p>
             <a:pPr algn="l"/>
             <a:r>
-              <a:rPr lang="en-US" altLang="zh-CN" kern="0" dirty="0">
+              <a:rPr lang="en-US" altLang="zh-CN" sz="1400" kern="0" dirty="0">
                 <a:solidFill>
                   <a:srgbClr val="000000"/>
                 </a:solidFill>
@@ -12018,7 +12042,7 @@
               <a:t>    </a:t>
             </a:r>
             <a:r>
-              <a:rPr lang="en-US" altLang="zh-CN" kern="0" dirty="0">
+              <a:rPr lang="en-US" altLang="zh-CN" sz="1400" kern="0" dirty="0">
                 <a:solidFill>
                   <a:srgbClr val="AF00DB"/>
                 </a:solidFill>
@@ -12030,7 +12054,7 @@
               <a:t>return</a:t>
             </a:r>
             <a:r>
-              <a:rPr lang="en-US" altLang="zh-CN" kern="0" dirty="0">
+              <a:rPr lang="en-US" altLang="zh-CN" sz="1400" kern="0" dirty="0">
                 <a:solidFill>
                   <a:srgbClr val="000000"/>
                 </a:solidFill>
@@ -12042,7 +12066,7 @@
               <a:t> </a:t>
             </a:r>
             <a:r>
-              <a:rPr lang="en-US" altLang="zh-CN" kern="0" dirty="0">
+              <a:rPr lang="en-US" altLang="zh-CN" sz="1400" kern="0" dirty="0">
                 <a:solidFill>
                   <a:srgbClr val="098658"/>
                 </a:solidFill>
@@ -12054,7 +12078,7 @@
               <a:t>0</a:t>
             </a:r>
             <a:r>
-              <a:rPr lang="en-US" altLang="zh-CN" kern="0" dirty="0">
+              <a:rPr lang="en-US" altLang="zh-CN" sz="1400" kern="0" dirty="0">
                 <a:solidFill>
                   <a:srgbClr val="000000"/>
                 </a:solidFill>
@@ -12065,7 +12089,7 @@
               </a:rPr>
               <a:t>;</a:t>
             </a:r>
-            <a:endParaRPr lang="zh-CN" altLang="zh-CN" kern="100" dirty="0">
+            <a:endParaRPr lang="zh-CN" altLang="zh-CN" sz="1400" kern="100" dirty="0">
               <a:effectLst/>
               <a:latin typeface="DengXian" panose="02010600030101010101" pitchFamily="2" charset="-122"/>
               <a:ea typeface="DengXian" panose="02010600030101010101" pitchFamily="2" charset="-122"/>
@@ -12075,7 +12099,7 @@
           <a:p>
             <a:pPr algn="l"/>
             <a:r>
-              <a:rPr lang="en-US" altLang="zh-CN" kern="0" dirty="0">
+              <a:rPr lang="en-US" altLang="zh-CN" sz="1400" kern="0" dirty="0">
                 <a:solidFill>
                   <a:srgbClr val="000000"/>
                 </a:solidFill>
@@ -12086,7 +12110,7 @@
               </a:rPr>
               <a:t>}</a:t>
             </a:r>
-            <a:endParaRPr lang="zh-CN" altLang="zh-CN" kern="100" dirty="0">
+            <a:endParaRPr lang="zh-CN" altLang="zh-CN" sz="1400" kern="100" dirty="0">
               <a:effectLst/>
               <a:latin typeface="DengXian" panose="02010600030101010101" pitchFamily="2" charset="-122"/>
               <a:ea typeface="DengXian" panose="02010600030101010101" pitchFamily="2" charset="-122"/>
@@ -12846,7 +12870,7 @@
               <a:t>argc</a:t>
             </a:r>
             <a:r>
-              <a:rPr lang="en-US" altLang="zh-CN" sz="1400" kern="0">
+              <a:rPr lang="en-US" altLang="zh-CN" sz="1400" kern="0" dirty="0">
                 <a:solidFill>
                   <a:srgbClr val="001080"/>
                 </a:solidFill>
@@ -12858,7 +12882,7 @@
               <a:t> </a:t>
             </a:r>
             <a:r>
-              <a:rPr lang="en-US" altLang="zh-CN" sz="1400" kern="0">
+              <a:rPr lang="en-US" altLang="zh-CN" sz="1400" kern="0" dirty="0">
                 <a:solidFill>
                   <a:srgbClr val="000000"/>
                 </a:solidFill>
@@ -12870,7 +12894,7 @@
               <a:t>== </a:t>
             </a:r>
             <a:r>
-              <a:rPr lang="en-US" altLang="zh-CN" sz="1400" kern="0">
+              <a:rPr lang="en-US" altLang="zh-CN" sz="1400" kern="0" dirty="0">
                 <a:solidFill>
                   <a:srgbClr val="098658"/>
                 </a:solidFill>

--- a/week05/Lab05.pptx
+++ b/week05/Lab05.pptx
@@ -254,7 +254,7 @@
           <a:p>
             <a:fld id="{D1237EF7-A117-46B7-88A8-1B7FB98FF0F2}" type="datetimeFigureOut">
               <a:rPr lang="zh-CN" altLang="en-US" smtClean="0"/>
-              <a:t>2026/3/29</a:t>
+              <a:t>2026/3/31</a:t>
             </a:fld>
             <a:endParaRPr lang="zh-CN" altLang="en-US"/>
           </a:p>
@@ -1119,7 +1119,7 @@
           <a:p>
             <a:fld id="{FC19A4FA-3D9A-4114-B0D5-759CBD56F1AB}" type="datetimeFigureOut">
               <a:rPr lang="zh-CN" altLang="en-US" smtClean="0"/>
-              <a:t>2026/3/29</a:t>
+              <a:t>2026/3/31</a:t>
             </a:fld>
             <a:endParaRPr lang="zh-CN" altLang="en-US"/>
           </a:p>
@@ -1313,7 +1313,7 @@
           <a:p>
             <a:fld id="{FC19A4FA-3D9A-4114-B0D5-759CBD56F1AB}" type="datetimeFigureOut">
               <a:rPr lang="zh-CN" altLang="en-US" smtClean="0"/>
-              <a:t>2026/3/29</a:t>
+              <a:t>2026/3/31</a:t>
             </a:fld>
             <a:endParaRPr lang="zh-CN" altLang="en-US"/>
           </a:p>
@@ -1486,7 +1486,7 @@
           <a:p>
             <a:fld id="{FC19A4FA-3D9A-4114-B0D5-759CBD56F1AB}" type="datetimeFigureOut">
               <a:rPr lang="zh-CN" altLang="en-US" smtClean="0"/>
-              <a:t>2026/3/29</a:t>
+              <a:t>2026/3/31</a:t>
             </a:fld>
             <a:endParaRPr lang="zh-CN" altLang="en-US"/>
           </a:p>
@@ -1670,7 +1670,7 @@
           <a:p>
             <a:fld id="{FC19A4FA-3D9A-4114-B0D5-759CBD56F1AB}" type="datetimeFigureOut">
               <a:rPr lang="zh-CN" altLang="en-US" smtClean="0"/>
-              <a:t>2026/3/29</a:t>
+              <a:t>2026/3/31</a:t>
             </a:fld>
             <a:endParaRPr lang="zh-CN" altLang="en-US"/>
           </a:p>
@@ -1927,7 +1927,7 @@
           <a:p>
             <a:fld id="{FC19A4FA-3D9A-4114-B0D5-759CBD56F1AB}" type="datetimeFigureOut">
               <a:rPr lang="zh-CN" altLang="en-US" smtClean="0"/>
-              <a:t>2026/3/29</a:t>
+              <a:t>2026/3/31</a:t>
             </a:fld>
             <a:endParaRPr lang="zh-CN" altLang="en-US"/>
           </a:p>
@@ -2314,7 +2314,7 @@
           <a:p>
             <a:fld id="{FC19A4FA-3D9A-4114-B0D5-759CBD56F1AB}" type="datetimeFigureOut">
               <a:rPr lang="zh-CN" altLang="en-US" smtClean="0"/>
-              <a:t>2026/3/29</a:t>
+              <a:t>2026/3/31</a:t>
             </a:fld>
             <a:endParaRPr lang="zh-CN" altLang="en-US"/>
           </a:p>
@@ -2582,7 +2582,7 @@
           <a:p>
             <a:fld id="{FC19A4FA-3D9A-4114-B0D5-759CBD56F1AB}" type="datetimeFigureOut">
               <a:rPr lang="zh-CN" altLang="en-US" smtClean="0"/>
-              <a:t>2026/3/29</a:t>
+              <a:t>2026/3/31</a:t>
             </a:fld>
             <a:endParaRPr lang="zh-CN" altLang="en-US"/>
           </a:p>
@@ -2722,7 +2722,7 @@
           <a:p>
             <a:fld id="{FC19A4FA-3D9A-4114-B0D5-759CBD56F1AB}" type="datetimeFigureOut">
               <a:rPr lang="zh-CN" altLang="en-US" smtClean="0"/>
-              <a:t>2026/3/29</a:t>
+              <a:t>2026/3/31</a:t>
             </a:fld>
             <a:endParaRPr lang="zh-CN" altLang="en-US"/>
           </a:p>
@@ -2812,7 +2812,7 @@
           <a:p>
             <a:fld id="{FC19A4FA-3D9A-4114-B0D5-759CBD56F1AB}" type="datetimeFigureOut">
               <a:rPr lang="zh-CN" altLang="en-US" smtClean="0"/>
-              <a:t>2026/3/29</a:t>
+              <a:t>2026/3/31</a:t>
             </a:fld>
             <a:endParaRPr lang="zh-CN" altLang="en-US"/>
           </a:p>
@@ -3082,7 +3082,7 @@
           <a:p>
             <a:fld id="{FC19A4FA-3D9A-4114-B0D5-759CBD56F1AB}" type="datetimeFigureOut">
               <a:rPr lang="zh-CN" altLang="en-US" smtClean="0"/>
-              <a:t>2026/3/29</a:t>
+              <a:t>2026/3/31</a:t>
             </a:fld>
             <a:endParaRPr lang="zh-CN" altLang="en-US"/>
           </a:p>
@@ -3329,7 +3329,7 @@
           <a:p>
             <a:fld id="{FC19A4FA-3D9A-4114-B0D5-759CBD56F1AB}" type="datetimeFigureOut">
               <a:rPr lang="zh-CN" altLang="en-US" smtClean="0"/>
-              <a:t>2026/3/29</a:t>
+              <a:t>2026/3/31</a:t>
             </a:fld>
             <a:endParaRPr lang="zh-CN" altLang="en-US"/>
           </a:p>
@@ -3535,7 +3535,7 @@
           <a:p>
             <a:fld id="{FC19A4FA-3D9A-4114-B0D5-759CBD56F1AB}" type="datetimeFigureOut">
               <a:rPr lang="zh-CN" altLang="en-US" smtClean="0"/>
-              <a:t>2026/3/29</a:t>
+              <a:t>2026/3/31</a:t>
             </a:fld>
             <a:endParaRPr lang="zh-CN" altLang="en-US"/>
           </a:p>
@@ -12193,7 +12193,7 @@
         <p:spPr>
           <a:xfrm>
             <a:off x="138952" y="1217752"/>
-            <a:ext cx="6169025" cy="4130675"/>
+            <a:ext cx="6381863" cy="4130675"/>
           </a:xfrm>
         </p:spPr>
         <p:txBody>
@@ -12213,7 +12213,7 @@
               <a:rPr lang="en-US" altLang="zh-CN" sz="2800" dirty="0">
                 <a:sym typeface="+mn-ea"/>
               </a:rPr>
-              <a:t>1. Determine whether the current system is in big-endian(BE) or little-endian(LE) based on the storage location of byte0 in </a:t>
+              <a:t>Determine whether your system uses big-endian (BE) or little-endian (LE) by examining where the least significant byte (byte 0) of </a:t>
             </a:r>
             <a:r>
               <a:rPr lang="en-US" altLang="zh-CN" sz="2800" dirty="0" err="1">
@@ -12227,7 +12227,7 @@
               <a:rPr lang="en-US" altLang="zh-CN" sz="2800" dirty="0">
                 <a:sym typeface="+mn-ea"/>
               </a:rPr>
-              <a:t>.</a:t>
+              <a:t> is stored in memory.</a:t>
             </a:r>
             <a:endParaRPr lang="en-US" altLang="zh-CN" sz="2800" dirty="0"/>
           </a:p>
@@ -12237,7 +12237,7 @@
               <a:rPr lang="en-US" altLang="zh-CN" sz="2800" dirty="0">
                 <a:sym typeface="+mn-ea"/>
               </a:rPr>
-              <a:t>2. Store each byte in </a:t>
+              <a:t>Copy each byte from </a:t>
             </a:r>
             <a:r>
               <a:rPr lang="en-US" altLang="zh-CN" sz="2800" dirty="0" err="1">
@@ -12251,7 +12251,7 @@
               <a:rPr lang="en-US" altLang="zh-CN" sz="2800" dirty="0">
                 <a:sym typeface="+mn-ea"/>
               </a:rPr>
-              <a:t> to a new space (</a:t>
+              <a:t> into a new memory location (either </a:t>
             </a:r>
             <a:r>
               <a:rPr lang="en-US" altLang="zh-CN" sz="2800" dirty="0" err="1">
@@ -12265,7 +12265,7 @@
               <a:rPr lang="en-US" altLang="zh-CN" sz="2800" dirty="0">
                 <a:sym typeface="+mn-ea"/>
               </a:rPr>
-              <a:t> or pointed by </a:t>
+              <a:t> or the space pointed to by </a:t>
             </a:r>
             <a:r>
               <a:rPr lang="en-US" altLang="zh-CN" sz="2800" dirty="0" err="1">
@@ -12279,9 +12279,8 @@
               <a:rPr lang="en-US" altLang="zh-CN" sz="2800" dirty="0">
                 <a:sym typeface="+mn-ea"/>
               </a:rPr>
-              <a:t>) in reverse order.</a:t>
-            </a:r>
-            <a:endParaRPr lang="en-US" altLang="zh-CN" sz="2800" dirty="0"/>
+              <a:t>), but in reverse order.</a:t>
+            </a:r>
           </a:p>
           <a:p>
             <a:pPr lvl="2"/>
@@ -12289,7 +12288,7 @@
               <a:rPr lang="en-US" altLang="zh-CN" sz="2800" dirty="0">
                 <a:sym typeface="+mn-ea"/>
               </a:rPr>
-              <a:t>If the command-line parameter of the program is ‘H’, use heap mode to implement swapping. </a:t>
+              <a:t>If the program's command-line argument is 'H', perform this byte-swapping using heap allocation (dynamic memory).</a:t>
             </a:r>
             <a:endParaRPr lang="en-US" altLang="zh-CN" sz="2800" dirty="0"/>
           </a:p>
@@ -12299,17 +12298,14 @@
               <a:rPr lang="en-US" altLang="zh-CN" sz="2800" dirty="0">
                 <a:sym typeface="+mn-ea"/>
               </a:rPr>
-              <a:t>If the command-line parameter of the program is ‘S’, use stack mode to implement swapping.</a:t>
-            </a:r>
-            <a:endParaRPr lang="en-US" altLang="zh-CN" sz="2800" dirty="0"/>
+              <a:t>If the argument is 'S', perform the swapping using stack allocation (a local variable).</a:t>
+            </a:r>
           </a:p>
           <a:p>
             <a:pPr lvl="2"/>
             <a:r>
-              <a:rPr lang="en-US" altLang="zh-CN" sz="2800" dirty="0">
-                <a:sym typeface="+mn-ea"/>
-              </a:rPr>
-              <a:t>Print out the value of </a:t>
+              <a:rPr lang="en-US" altLang="zh-CN" sz="2800" dirty="0"/>
+              <a:t>Print the hexadecimal value stored at this new location (either </a:t>
             </a:r>
             <a:r>
               <a:rPr lang="en-US" altLang="zh-CN" sz="2800" dirty="0" err="1">
@@ -12320,10 +12316,16 @@
               <a:t>numB</a:t>
             </a:r>
             <a:r>
+              <a:rPr lang="en-US" altLang="zh-CN" sz="2800" dirty="0"/>
+              <a:t> or</a:t>
+            </a:r>
+            <a:r>
               <a:rPr lang="en-US" altLang="zh-CN" sz="2800" dirty="0">
+                <a:latin typeface="Courier New" panose="02070309020205020404" pitchFamily="49" charset="0"/>
+                <a:cs typeface="Courier New" panose="02070309020205020404" pitchFamily="49" charset="0"/>
                 <a:sym typeface="+mn-ea"/>
               </a:rPr>
-              <a:t> (or pointed by </a:t>
+              <a:t> *</a:t>
             </a:r>
             <a:r>
               <a:rPr lang="en-US" altLang="zh-CN" sz="2800" dirty="0" err="1">
@@ -12334,25 +12336,22 @@
               <a:t>pnumB</a:t>
             </a:r>
             <a:r>
-              <a:rPr lang="en-US" altLang="zh-CN" sz="2800" dirty="0">
-                <a:sym typeface="+mn-ea"/>
-              </a:rPr>
-              <a:t>) in hexadecimal.</a:t>
-            </a:r>
-            <a:endParaRPr lang="en-US" altLang="zh-CN" dirty="0"/>
+              <a:rPr lang="en-US" altLang="zh-CN" sz="2800" dirty="0"/>
+              <a:t>).</a:t>
+            </a:r>
           </a:p>
           <a:p>
             <a:r>
               <a:rPr lang="en-US" altLang="zh-CN" dirty="0"/>
-              <a:t>3-2. Use the tool </a:t>
+              <a:t>3-2. Use the </a:t>
             </a:r>
             <a:r>
               <a:rPr lang="en-US" altLang="zh-CN" dirty="0" err="1"/>
-              <a:t>valgrind</a:t>
+              <a:t>Valgrind</a:t>
             </a:r>
             <a:r>
               <a:rPr lang="en-US" altLang="zh-CN" dirty="0"/>
-              <a:t> to check if there is memory problem on the code. </a:t>
+              <a:t> tool to check your completed code for any memory-related problems. </a:t>
             </a:r>
           </a:p>
           <a:p>
@@ -12383,7 +12382,7 @@
         </p:blipFill>
         <p:spPr>
           <a:xfrm>
-            <a:off x="2470150" y="5454127"/>
+            <a:off x="4495912" y="5498577"/>
             <a:ext cx="7696088" cy="1359423"/>
           </a:xfrm>
           <a:prstGeom prst="rect">
